--- a/pncli-overview.pptx
+++ b/pncli-overview.pptx
@@ -17,6 +17,7 @@
     <p:sldId id="265" r:id="rId17"/>
     <p:sldId id="266" r:id="rId18"/>
     <p:sldId id="267" r:id="rId19"/>
+    <p:sldId id="269" r:id="rId21"/>
     <p:sldId id="268" r:id="rId20"/>
   </p:sldIdLst>
   <p:sldSz cx="12191695" cy="6858000" type="screen4x3"/>
@@ -9143,6 +9144,922 @@
                 <a:latin typeface="Segoe UI"/>
               </a:rPr>
               <a:t>   —   green across the board is ten minutes away.</a:t>
+            </a:r>
+          </a:p>
+        </p:txBody>
+      </p:sp>
+    </p:spTree>
+  </p:cSld>
+  <p:clrMapOvr>
+    <a:masterClrMapping/>
+  </p:clrMapOvr>
+</p:sld>
+</file>
+
+<file path=ppt/slides/slide14.xml><?xml version="1.0" encoding="utf-8"?>
+<p:sld xmlns:a="http://schemas.openxmlformats.org/drawingml/2006/main" xmlns:p="http://schemas.openxmlformats.org/presentationml/2006/main" xmlns:r="http://schemas.openxmlformats.org/officeDocument/2006/relationships">
+  <p:cSld>
+    <p:spTree>
+      <p:nvGrpSpPr>
+        <p:cNvPr id="1" name=""/>
+        <p:cNvGrpSpPr/>
+        <p:nvPr/>
+      </p:nvGrpSpPr>
+      <p:grpSpPr/>
+      <p:sp>
+        <p:nvSpPr>
+          <p:cNvPr id="2" name="Rectangle 1"/>
+          <p:cNvSpPr/>
+          <p:nvPr/>
+        </p:nvSpPr>
+        <p:spPr>
+          <a:xfrm>
+            <a:off x="0" y="0"/>
+            <a:ext cx="12191695" cy="6858000"/>
+          </a:xfrm>
+          <a:prstGeom prst="rect">
+            <a:avLst/>
+          </a:prstGeom>
+          <a:solidFill>
+            <a:srgbClr val="0F1B2D"/>
+          </a:solidFill>
+          <a:ln>
+            <a:noFill/>
+          </a:ln>
+          <a:effectLst/>
+        </p:spPr>
+        <p:style>
+          <a:lnRef idx="1">
+            <a:schemeClr val="accent1"/>
+          </a:lnRef>
+          <a:fillRef idx="3">
+            <a:schemeClr val="accent1"/>
+          </a:fillRef>
+          <a:effectRef idx="2">
+            <a:schemeClr val="accent1"/>
+          </a:effectRef>
+          <a:fontRef idx="minor">
+            <a:schemeClr val="lt1"/>
+          </a:fontRef>
+        </p:style>
+        <p:txBody>
+          <a:bodyPr rtlCol="0" anchor="ctr"/>
+          <a:lstStyle/>
+          <a:p>
+            <a:pPr algn="ctr"/>
+          </a:p>
+        </p:txBody>
+      </p:sp>
+      <p:sp>
+        <p:nvSpPr>
+          <p:cNvPr id="3" name="Rectangle 2"/>
+          <p:cNvSpPr/>
+          <p:nvPr/>
+        </p:nvSpPr>
+        <p:spPr>
+          <a:xfrm>
+            <a:off x="548640" y="502920"/>
+            <a:ext cx="457200" cy="64008"/>
+          </a:xfrm>
+          <a:prstGeom prst="rect">
+            <a:avLst/>
+          </a:prstGeom>
+          <a:solidFill>
+            <a:srgbClr val="00C2A8"/>
+          </a:solidFill>
+          <a:ln>
+            <a:noFill/>
+          </a:ln>
+          <a:effectLst/>
+        </p:spPr>
+        <p:style>
+          <a:lnRef idx="1">
+            <a:schemeClr val="accent1"/>
+          </a:lnRef>
+          <a:fillRef idx="3">
+            <a:schemeClr val="accent1"/>
+          </a:fillRef>
+          <a:effectRef idx="2">
+            <a:schemeClr val="accent1"/>
+          </a:effectRef>
+          <a:fontRef idx="minor">
+            <a:schemeClr val="lt1"/>
+          </a:fontRef>
+        </p:style>
+        <p:txBody>
+          <a:bodyPr rtlCol="0" anchor="ctr"/>
+          <a:lstStyle/>
+          <a:p>
+            <a:pPr algn="ctr"/>
+          </a:p>
+        </p:txBody>
+      </p:sp>
+      <p:sp>
+        <p:nvSpPr>
+          <p:cNvPr id="4" name="TextBox 3"/>
+          <p:cNvSpPr txBox="1"/>
+          <p:nvPr/>
+        </p:nvSpPr>
+        <p:spPr>
+          <a:xfrm>
+            <a:off x="548640" y="621792"/>
+            <a:ext cx="7315200" cy="365760"/>
+          </a:xfrm>
+          <a:prstGeom prst="rect">
+            <a:avLst/>
+          </a:prstGeom>
+          <a:noFill/>
+        </p:spPr>
+        <p:txBody>
+          <a:bodyPr wrap="square">
+            <a:spAutoFit/>
+          </a:bodyPr>
+          <a:lstStyle/>
+          <a:p>
+            <a:r>
+              <a:rPr sz="1300" b="1">
+                <a:solidFill>
+                  <a:srgbClr val="00C2A8"/>
+                </a:solidFill>
+                <a:latin typeface="Segoe UI"/>
+              </a:rPr>
+              <a:t>THE CREATOR</a:t>
+            </a:r>
+          </a:p>
+        </p:txBody>
+      </p:sp>
+      <p:sp>
+        <p:nvSpPr>
+          <p:cNvPr id="5" name="TextBox 4"/>
+          <p:cNvSpPr txBox="1"/>
+          <p:nvPr/>
+        </p:nvSpPr>
+        <p:spPr>
+          <a:xfrm>
+            <a:off x="11155680" y="621792"/>
+            <a:ext cx="640080" cy="365760"/>
+          </a:xfrm>
+          <a:prstGeom prst="rect">
+            <a:avLst/>
+          </a:prstGeom>
+          <a:noFill/>
+        </p:spPr>
+        <p:txBody>
+          <a:bodyPr wrap="square">
+            <a:spAutoFit/>
+          </a:bodyPr>
+          <a:lstStyle/>
+          <a:p>
+            <a:r>
+              <a:rPr sz="1300" b="1">
+                <a:solidFill>
+                  <a:srgbClr val="7C8CA0"/>
+                </a:solidFill>
+                <a:latin typeface="Segoe UI"/>
+              </a:rPr>
+              <a:t>13</a:t>
+            </a:r>
+          </a:p>
+        </p:txBody>
+      </p:sp>
+      <p:sp>
+        <p:nvSpPr>
+          <p:cNvPr id="6" name="TextBox 5"/>
+          <p:cNvSpPr txBox="1"/>
+          <p:nvPr/>
+        </p:nvSpPr>
+        <p:spPr>
+          <a:xfrm>
+            <a:off x="548640" y="960120"/>
+            <a:ext cx="11064240" cy="822960"/>
+          </a:xfrm>
+          <a:prstGeom prst="rect">
+            <a:avLst/>
+          </a:prstGeom>
+          <a:noFill/>
+        </p:spPr>
+        <p:txBody>
+          <a:bodyPr wrap="square">
+            <a:spAutoFit/>
+          </a:bodyPr>
+          <a:lstStyle/>
+          <a:p>
+            <a:r>
+              <a:rPr sz="3400" b="1">
+                <a:solidFill>
+                  <a:srgbClr val="FFFFFF"/>
+                </a:solidFill>
+                <a:latin typeface="Segoe UI"/>
+              </a:rPr>
+              <a:t>The engineer behind pncli: Sunny Kolattukudy</a:t>
+            </a:r>
+          </a:p>
+        </p:txBody>
+      </p:sp>
+      <p:sp>
+        <p:nvSpPr>
+          <p:cNvPr id="7" name="Rounded Rectangle 6"/>
+          <p:cNvSpPr/>
+          <p:nvPr/>
+        </p:nvSpPr>
+        <p:spPr>
+          <a:xfrm>
+            <a:off x="548640" y="1965960"/>
+            <a:ext cx="5440680" cy="4343400"/>
+          </a:xfrm>
+          <a:prstGeom prst="roundRect">
+            <a:avLst/>
+          </a:prstGeom>
+          <a:solidFill>
+            <a:srgbClr val="162740"/>
+          </a:solidFill>
+          <a:ln>
+            <a:noFill/>
+          </a:ln>
+          <a:effectLst/>
+        </p:spPr>
+        <p:style>
+          <a:lnRef idx="1">
+            <a:schemeClr val="accent1"/>
+          </a:lnRef>
+          <a:fillRef idx="3">
+            <a:schemeClr val="accent1"/>
+          </a:fillRef>
+          <a:effectRef idx="2">
+            <a:schemeClr val="accent1"/>
+          </a:effectRef>
+          <a:fontRef idx="minor">
+            <a:schemeClr val="lt1"/>
+          </a:fontRef>
+        </p:style>
+        <p:txBody>
+          <a:bodyPr rtlCol="0" anchor="ctr"/>
+          <a:lstStyle/>
+          <a:p>
+            <a:pPr algn="ctr"/>
+          </a:p>
+        </p:txBody>
+      </p:sp>
+      <p:sp>
+        <p:nvSpPr>
+          <p:cNvPr id="8" name="Rectangle 7"/>
+          <p:cNvSpPr/>
+          <p:nvPr/>
+        </p:nvSpPr>
+        <p:spPr>
+          <a:xfrm>
+            <a:off x="548640" y="1965960"/>
+            <a:ext cx="82296" cy="4343400"/>
+          </a:xfrm>
+          <a:prstGeom prst="rect">
+            <a:avLst/>
+          </a:prstGeom>
+          <a:solidFill>
+            <a:srgbClr val="00C2A8"/>
+          </a:solidFill>
+          <a:ln>
+            <a:noFill/>
+          </a:ln>
+          <a:effectLst/>
+        </p:spPr>
+        <p:style>
+          <a:lnRef idx="1">
+            <a:schemeClr val="accent1"/>
+          </a:lnRef>
+          <a:fillRef idx="3">
+            <a:schemeClr val="accent1"/>
+          </a:fillRef>
+          <a:effectRef idx="2">
+            <a:schemeClr val="accent1"/>
+          </a:effectRef>
+          <a:fontRef idx="minor">
+            <a:schemeClr val="lt1"/>
+          </a:fontRef>
+        </p:style>
+        <p:txBody>
+          <a:bodyPr rtlCol="0" anchor="ctr"/>
+          <a:lstStyle/>
+          <a:p>
+            <a:pPr algn="ctr"/>
+          </a:p>
+        </p:txBody>
+      </p:sp>
+      <p:sp>
+        <p:nvSpPr>
+          <p:cNvPr id="9" name="TextBox 8"/>
+          <p:cNvSpPr txBox="1"/>
+          <p:nvPr/>
+        </p:nvSpPr>
+        <p:spPr>
+          <a:xfrm>
+            <a:off x="868680" y="2221992"/>
+            <a:ext cx="4846320" cy="457200"/>
+          </a:xfrm>
+          <a:prstGeom prst="rect">
+            <a:avLst/>
+          </a:prstGeom>
+          <a:noFill/>
+        </p:spPr>
+        <p:txBody>
+          <a:bodyPr wrap="square">
+            <a:spAutoFit/>
+          </a:bodyPr>
+          <a:lstStyle/>
+          <a:p>
+            <a:r>
+              <a:rPr sz="2200" b="1">
+                <a:solidFill>
+                  <a:srgbClr val="FFFFFF"/>
+                </a:solidFill>
+                <a:latin typeface="Segoe UI"/>
+              </a:rPr>
+              <a:t>Sunny Kolattukudy</a:t>
+            </a:r>
+          </a:p>
+        </p:txBody>
+      </p:sp>
+      <p:sp>
+        <p:nvSpPr>
+          <p:cNvPr id="10" name="TextBox 9"/>
+          <p:cNvSpPr txBox="1"/>
+          <p:nvPr/>
+        </p:nvSpPr>
+        <p:spPr>
+          <a:xfrm>
+            <a:off x="868680" y="2733040"/>
+            <a:ext cx="4846320" cy="731520"/>
+          </a:xfrm>
+          <a:prstGeom prst="rect">
+            <a:avLst/>
+          </a:prstGeom>
+          <a:noFill/>
+        </p:spPr>
+        <p:txBody>
+          <a:bodyPr wrap="square">
+            <a:spAutoFit/>
+          </a:bodyPr>
+          <a:lstStyle/>
+          <a:p>
+            <a:r>
+              <a:rPr sz="1300" b="1">
+                <a:solidFill>
+                  <a:srgbClr val="00C2A8"/>
+                </a:solidFill>
+                <a:latin typeface="Segoe UI"/>
+              </a:rPr>
+              <a:t>Staff Engineer · Developer Experience Guild Leader</a:t>
+            </a:r>
+          </a:p>
+          <a:p>
+            <a:r>
+              <a:rPr sz="1200" b="0">
+                <a:solidFill>
+                  <a:srgbClr val="C5D2E0"/>
+                </a:solidFill>
+                <a:latin typeface="Segoe UI"/>
+              </a:rPr>
+              <a:t>Verifiable — Columbus, OH</a:t>
+            </a:r>
+          </a:p>
+        </p:txBody>
+      </p:sp>
+      <p:sp>
+        <p:nvSpPr>
+          <p:cNvPr id="11" name="TextBox 10"/>
+          <p:cNvSpPr txBox="1"/>
+          <p:nvPr/>
+        </p:nvSpPr>
+        <p:spPr>
+          <a:xfrm>
+            <a:off x="868680" y="3648075"/>
+            <a:ext cx="4846320" cy="1966640"/>
+          </a:xfrm>
+          <a:prstGeom prst="rect">
+            <a:avLst/>
+          </a:prstGeom>
+          <a:noFill/>
+        </p:spPr>
+        <p:txBody>
+          <a:bodyPr wrap="square">
+            <a:spAutoFit/>
+          </a:bodyPr>
+          <a:lstStyle/>
+          <a:p>
+            <a:pPr>
+              <a:lnSpc>
+                <a:spcPct val="115000"/>
+              </a:lnSpc>
+            </a:pPr>
+            <a:r>
+              <a:rPr sz="1400" b="0">
+                <a:solidFill>
+                  <a:srgbClr val="C5D2E0"/>
+                </a:solidFill>
+                <a:latin typeface="Segoe UI"/>
+              </a:rPr>
+              <a:t>A career spanning finance, HR tech, and health credentialing. Trained at Case Western Reserve University and Cleveland Clinic's Lerner College of Medicine — bringing medicine's first rule to engineering: understand the problem fully before acting.</a:t>
+            </a:r>
+          </a:p>
+        </p:txBody>
+      </p:sp>
+      <p:sp>
+        <p:nvSpPr>
+          <p:cNvPr id="12" name="TextBox 11"/>
+          <p:cNvSpPr txBox="1"/>
+          <p:nvPr/>
+        </p:nvSpPr>
+        <p:spPr>
+          <a:xfrm>
+            <a:off x="868680" y="5760720"/>
+            <a:ext cx="4846320" cy="365760"/>
+          </a:xfrm>
+          <a:prstGeom prst="rect">
+            <a:avLst/>
+          </a:prstGeom>
+          <a:noFill/>
+        </p:spPr>
+        <p:txBody>
+          <a:bodyPr wrap="square">
+            <a:spAutoFit/>
+          </a:bodyPr>
+          <a:lstStyle/>
+          <a:p>
+            <a:r>
+              <a:rPr sz="1300" b="0">
+                <a:solidFill>
+                  <a:srgbClr val="00C2A8"/>
+                </a:solidFill>
+                <a:latin typeface="Consolas"/>
+              </a:rPr>
+              <a:t>kolatts.github.io</a:t>
+            </a:r>
+          </a:p>
+        </p:txBody>
+      </p:sp>
+      <p:sp>
+        <p:nvSpPr>
+          <p:cNvPr id="13" name="Rounded Rectangle 12"/>
+          <p:cNvSpPr/>
+          <p:nvPr/>
+        </p:nvSpPr>
+        <p:spPr>
+          <a:xfrm>
+            <a:off x="6217920" y="1965960"/>
+            <a:ext cx="5440680" cy="1280160"/>
+          </a:xfrm>
+          <a:prstGeom prst="roundRect">
+            <a:avLst/>
+          </a:prstGeom>
+          <a:solidFill>
+            <a:srgbClr val="162740"/>
+          </a:solidFill>
+          <a:ln>
+            <a:noFill/>
+          </a:ln>
+          <a:effectLst/>
+        </p:spPr>
+        <p:style>
+          <a:lnRef idx="1">
+            <a:schemeClr val="accent1"/>
+          </a:lnRef>
+          <a:fillRef idx="3">
+            <a:schemeClr val="accent1"/>
+          </a:fillRef>
+          <a:effectRef idx="2">
+            <a:schemeClr val="accent1"/>
+          </a:effectRef>
+          <a:fontRef idx="minor">
+            <a:schemeClr val="lt1"/>
+          </a:fontRef>
+        </p:style>
+        <p:txBody>
+          <a:bodyPr rtlCol="0" anchor="ctr"/>
+          <a:lstStyle/>
+          <a:p>
+            <a:pPr algn="ctr"/>
+          </a:p>
+        </p:txBody>
+      </p:sp>
+      <p:sp>
+        <p:nvSpPr>
+          <p:cNvPr id="14" name="Rectangle 13"/>
+          <p:cNvSpPr/>
+          <p:nvPr/>
+        </p:nvSpPr>
+        <p:spPr>
+          <a:xfrm>
+            <a:off x="6217920" y="1965960"/>
+            <a:ext cx="82296" cy="1280160"/>
+          </a:xfrm>
+          <a:prstGeom prst="rect">
+            <a:avLst/>
+          </a:prstGeom>
+          <a:solidFill>
+            <a:srgbClr val="00C2A8"/>
+          </a:solidFill>
+          <a:ln>
+            <a:noFill/>
+          </a:ln>
+          <a:effectLst/>
+        </p:spPr>
+        <p:style>
+          <a:lnRef idx="1">
+            <a:schemeClr val="accent1"/>
+          </a:lnRef>
+          <a:fillRef idx="3">
+            <a:schemeClr val="accent1"/>
+          </a:fillRef>
+          <a:effectRef idx="2">
+            <a:schemeClr val="accent1"/>
+          </a:effectRef>
+          <a:fontRef idx="minor">
+            <a:schemeClr val="lt1"/>
+          </a:fontRef>
+        </p:style>
+        <p:txBody>
+          <a:bodyPr rtlCol="0" anchor="ctr"/>
+          <a:lstStyle/>
+          <a:p>
+            <a:pPr algn="ctr"/>
+          </a:p>
+        </p:txBody>
+      </p:sp>
+      <p:sp>
+        <p:nvSpPr>
+          <p:cNvPr id="15" name="TextBox 14"/>
+          <p:cNvSpPr txBox="1"/>
+          <p:nvPr/>
+        </p:nvSpPr>
+        <p:spPr>
+          <a:xfrm>
+            <a:off x="6537960" y="2093976"/>
+            <a:ext cx="4846320" cy="365760"/>
+          </a:xfrm>
+          <a:prstGeom prst="rect">
+            <a:avLst/>
+          </a:prstGeom>
+          <a:noFill/>
+        </p:spPr>
+        <p:txBody>
+          <a:bodyPr wrap="square">
+            <a:spAutoFit/>
+          </a:bodyPr>
+          <a:lstStyle/>
+          <a:p>
+            <a:r>
+              <a:rPr sz="1500" b="1">
+                <a:solidFill>
+                  <a:srgbClr val="FFFFFF"/>
+                </a:solidFill>
+                <a:latin typeface="Segoe UI"/>
+              </a:rPr>
+              <a:t>AI-powered code review</a:t>
+            </a:r>
+          </a:p>
+        </p:txBody>
+      </p:sp>
+      <p:sp>
+        <p:nvSpPr>
+          <p:cNvPr id="16" name="TextBox 15"/>
+          <p:cNvSpPr txBox="1"/>
+          <p:nvPr/>
+        </p:nvSpPr>
+        <p:spPr>
+          <a:xfrm>
+            <a:off x="6537960" y="2459736"/>
+            <a:ext cx="4846320" cy="731520"/>
+          </a:xfrm>
+          <a:prstGeom prst="rect">
+            <a:avLst/>
+          </a:prstGeom>
+          <a:noFill/>
+        </p:spPr>
+        <p:txBody>
+          <a:bodyPr wrap="square">
+            <a:spAutoFit/>
+          </a:bodyPr>
+          <a:lstStyle/>
+          <a:p>
+            <a:r>
+              <a:rPr sz="1200" b="0">
+                <a:solidFill>
+                  <a:srgbClr val="C5D2E0"/>
+                </a:solidFill>
+                <a:latin typeface="Segoe UI"/>
+              </a:rPr>
+              <a:t>Built a review pipeline on AWS Bedrock at Verifiable — cutting PR review time by 30+ minutes per pull request.</a:t>
+            </a:r>
+          </a:p>
+        </p:txBody>
+      </p:sp>
+      <p:sp>
+        <p:nvSpPr>
+          <p:cNvPr id="17" name="Rounded Rectangle 16"/>
+          <p:cNvSpPr/>
+          <p:nvPr/>
+        </p:nvSpPr>
+        <p:spPr>
+          <a:xfrm>
+            <a:off x="6217920" y="3497580"/>
+            <a:ext cx="5440680" cy="1280160"/>
+          </a:xfrm>
+          <a:prstGeom prst="roundRect">
+            <a:avLst/>
+          </a:prstGeom>
+          <a:solidFill>
+            <a:srgbClr val="162740"/>
+          </a:solidFill>
+          <a:ln>
+            <a:noFill/>
+          </a:ln>
+          <a:effectLst/>
+        </p:spPr>
+        <p:style>
+          <a:lnRef idx="1">
+            <a:schemeClr val="accent1"/>
+          </a:lnRef>
+          <a:fillRef idx="3">
+            <a:schemeClr val="accent1"/>
+          </a:fillRef>
+          <a:effectRef idx="2">
+            <a:schemeClr val="accent1"/>
+          </a:effectRef>
+          <a:fontRef idx="minor">
+            <a:schemeClr val="lt1"/>
+          </a:fontRef>
+        </p:style>
+        <p:txBody>
+          <a:bodyPr rtlCol="0" anchor="ctr"/>
+          <a:lstStyle/>
+          <a:p>
+            <a:pPr algn="ctr"/>
+          </a:p>
+        </p:txBody>
+      </p:sp>
+      <p:sp>
+        <p:nvSpPr>
+          <p:cNvPr id="18" name="Rectangle 17"/>
+          <p:cNvSpPr/>
+          <p:nvPr/>
+        </p:nvSpPr>
+        <p:spPr>
+          <a:xfrm>
+            <a:off x="6217920" y="3497580"/>
+            <a:ext cx="82296" cy="1280160"/>
+          </a:xfrm>
+          <a:prstGeom prst="rect">
+            <a:avLst/>
+          </a:prstGeom>
+          <a:solidFill>
+            <a:srgbClr val="00C2A8"/>
+          </a:solidFill>
+          <a:ln>
+            <a:noFill/>
+          </a:ln>
+          <a:effectLst/>
+        </p:spPr>
+        <p:style>
+          <a:lnRef idx="1">
+            <a:schemeClr val="accent1"/>
+          </a:lnRef>
+          <a:fillRef idx="3">
+            <a:schemeClr val="accent1"/>
+          </a:fillRef>
+          <a:effectRef idx="2">
+            <a:schemeClr val="accent1"/>
+          </a:effectRef>
+          <a:fontRef idx="minor">
+            <a:schemeClr val="lt1"/>
+          </a:fontRef>
+        </p:style>
+        <p:txBody>
+          <a:bodyPr rtlCol="0" anchor="ctr"/>
+          <a:lstStyle/>
+          <a:p>
+            <a:pPr algn="ctr"/>
+          </a:p>
+        </p:txBody>
+      </p:sp>
+      <p:sp>
+        <p:nvSpPr>
+          <p:cNvPr id="19" name="TextBox 18"/>
+          <p:cNvSpPr txBox="1"/>
+          <p:nvPr/>
+        </p:nvSpPr>
+        <p:spPr>
+          <a:xfrm>
+            <a:off x="6537960" y="3625596"/>
+            <a:ext cx="4846320" cy="365760"/>
+          </a:xfrm>
+          <a:prstGeom prst="rect">
+            <a:avLst/>
+          </a:prstGeom>
+          <a:noFill/>
+        </p:spPr>
+        <p:txBody>
+          <a:bodyPr wrap="square">
+            <a:spAutoFit/>
+          </a:bodyPr>
+          <a:lstStyle/>
+          <a:p>
+            <a:r>
+              <a:rPr sz="1500" b="1">
+                <a:solidFill>
+                  <a:srgbClr val="FFFFFF"/>
+                </a:solidFill>
+                <a:latin typeface="Segoe UI"/>
+              </a:rPr>
+              <a:t>Agentic engineering systems</a:t>
+            </a:r>
+          </a:p>
+        </p:txBody>
+      </p:sp>
+      <p:sp>
+        <p:nvSpPr>
+          <p:cNvPr id="20" name="TextBox 19"/>
+          <p:cNvSpPr txBox="1"/>
+          <p:nvPr/>
+        </p:nvSpPr>
+        <p:spPr>
+          <a:xfrm>
+            <a:off x="6537960" y="3991356"/>
+            <a:ext cx="4846320" cy="731520"/>
+          </a:xfrm>
+          <a:prstGeom prst="rect">
+            <a:avLst/>
+          </a:prstGeom>
+          <a:noFill/>
+        </p:spPr>
+        <p:txBody>
+          <a:bodyPr wrap="square">
+            <a:spAutoFit/>
+          </a:bodyPr>
+          <a:lstStyle/>
+          <a:p>
+            <a:r>
+              <a:rPr sz="1200" b="0">
+                <a:solidFill>
+                  <a:srgbClr val="C5D2E0"/>
+                </a:solidFill>
+                <a:latin typeface="Segoe UI"/>
+              </a:rPr>
+              <a:t>Specializes in the scaffolding that makes teams move faster: review pipelines, plugin marketplaces, and pncli itself.</a:t>
+            </a:r>
+          </a:p>
+        </p:txBody>
+      </p:sp>
+      <p:sp>
+        <p:nvSpPr>
+          <p:cNvPr id="21" name="Rounded Rectangle 20"/>
+          <p:cNvSpPr/>
+          <p:nvPr/>
+        </p:nvSpPr>
+        <p:spPr>
+          <a:xfrm>
+            <a:off x="6217920" y="5029200"/>
+            <a:ext cx="5440680" cy="1280160"/>
+          </a:xfrm>
+          <a:prstGeom prst="roundRect">
+            <a:avLst/>
+          </a:prstGeom>
+          <a:solidFill>
+            <a:srgbClr val="162740"/>
+          </a:solidFill>
+          <a:ln>
+            <a:noFill/>
+          </a:ln>
+          <a:effectLst/>
+        </p:spPr>
+        <p:style>
+          <a:lnRef idx="1">
+            <a:schemeClr val="accent1"/>
+          </a:lnRef>
+          <a:fillRef idx="3">
+            <a:schemeClr val="accent1"/>
+          </a:fillRef>
+          <a:effectRef idx="2">
+            <a:schemeClr val="accent1"/>
+          </a:effectRef>
+          <a:fontRef idx="minor">
+            <a:schemeClr val="lt1"/>
+          </a:fontRef>
+        </p:style>
+        <p:txBody>
+          <a:bodyPr rtlCol="0" anchor="ctr"/>
+          <a:lstStyle/>
+          <a:p>
+            <a:pPr algn="ctr"/>
+          </a:p>
+        </p:txBody>
+      </p:sp>
+      <p:sp>
+        <p:nvSpPr>
+          <p:cNvPr id="22" name="Rectangle 21"/>
+          <p:cNvSpPr/>
+          <p:nvPr/>
+        </p:nvSpPr>
+        <p:spPr>
+          <a:xfrm>
+            <a:off x="6217920" y="5029200"/>
+            <a:ext cx="82296" cy="1280160"/>
+          </a:xfrm>
+          <a:prstGeom prst="rect">
+            <a:avLst/>
+          </a:prstGeom>
+          <a:solidFill>
+            <a:srgbClr val="FFB454"/>
+          </a:solidFill>
+          <a:ln>
+            <a:noFill/>
+          </a:ln>
+          <a:effectLst/>
+        </p:spPr>
+        <p:style>
+          <a:lnRef idx="1">
+            <a:schemeClr val="accent1"/>
+          </a:lnRef>
+          <a:fillRef idx="3">
+            <a:schemeClr val="accent1"/>
+          </a:fillRef>
+          <a:effectRef idx="2">
+            <a:schemeClr val="accent1"/>
+          </a:effectRef>
+          <a:fontRef idx="minor">
+            <a:schemeClr val="lt1"/>
+          </a:fontRef>
+        </p:style>
+        <p:txBody>
+          <a:bodyPr rtlCol="0" anchor="ctr"/>
+          <a:lstStyle/>
+          <a:p>
+            <a:pPr algn="ctr"/>
+          </a:p>
+        </p:txBody>
+      </p:sp>
+      <p:sp>
+        <p:nvSpPr>
+          <p:cNvPr id="23" name="TextBox 22"/>
+          <p:cNvSpPr txBox="1"/>
+          <p:nvPr/>
+        </p:nvSpPr>
+        <p:spPr>
+          <a:xfrm>
+            <a:off x="6537960" y="5157216"/>
+            <a:ext cx="4846320" cy="365760"/>
+          </a:xfrm>
+          <a:prstGeom prst="rect">
+            <a:avLst/>
+          </a:prstGeom>
+          <a:noFill/>
+        </p:spPr>
+        <p:txBody>
+          <a:bodyPr wrap="square">
+            <a:spAutoFit/>
+          </a:bodyPr>
+          <a:lstStyle/>
+          <a:p>
+            <a:r>
+              <a:rPr sz="1500" b="1">
+                <a:solidFill>
+                  <a:srgbClr val="FFFFFF"/>
+                </a:solidFill>
+                <a:latin typeface="Segoe UI"/>
+              </a:rPr>
+              <a:t>More than code</a:t>
+            </a:r>
+          </a:p>
+        </p:txBody>
+      </p:sp>
+      <p:sp>
+        <p:nvSpPr>
+          <p:cNvPr id="24" name="TextBox 23"/>
+          <p:cNvSpPr txBox="1"/>
+          <p:nvPr/>
+        </p:nvSpPr>
+        <p:spPr>
+          <a:xfrm>
+            <a:off x="6537960" y="5522976"/>
+            <a:ext cx="4846320" cy="731520"/>
+          </a:xfrm>
+          <a:prstGeom prst="rect">
+            <a:avLst/>
+          </a:prstGeom>
+          <a:noFill/>
+        </p:spPr>
+        <p:txBody>
+          <a:bodyPr wrap="square">
+            <a:spAutoFit/>
+          </a:bodyPr>
+          <a:lstStyle/>
+          <a:p>
+            <a:r>
+              <a:rPr sz="1200" b="0">
+                <a:solidFill>
+                  <a:srgbClr val="C5D2E0"/>
+                </a:solidFill>
+                <a:latin typeface="Segoe UI"/>
+              </a:rPr>
+              <a:t>Mentors engineers across organizations — and co-founded melodic thrash band Deadiron, where high-functioning teams are a stage skill too.</a:t>
             </a:r>
           </a:p>
         </p:txBody>

--- a/pncli-overview.pptx
+++ b/pncli-overview.pptx
@@ -6020,6 +6020,49 @@
           </a:p>
         </p:txBody>
       </p:sp>
+      <p:sp>
+        <p:nvSpPr>
+          <p:cNvPr id="12" name="TextBox 11"/>
+          <p:cNvSpPr txBox="1"/>
+          <p:nvPr/>
+        </p:nvSpPr>
+        <p:spPr>
+          <a:xfrm>
+            <a:off x="548640" y="6172200"/>
+            <a:ext cx="11064240" cy="457200"/>
+          </a:xfrm>
+          <a:prstGeom prst="rect">
+            <a:avLst/>
+          </a:prstGeom>
+          <a:noFill/>
+        </p:spPr>
+        <p:txBody>
+          <a:bodyPr wrap="square">
+            <a:spAutoFit/>
+          </a:bodyPr>
+          <a:lstStyle/>
+          <a:p>
+            <a:r>
+              <a:rPr sz="1400" b="0">
+                <a:solidFill>
+                  <a:srgbClr val="5A6B7E"/>
+                </a:solidFill>
+                <a:latin typeface="Segoe UI"/>
+              </a:rPr>
+              <a:t>Debugging prod used to be like smelling smoke in someone else's kitchen. </a:t>
+            </a:r>
+            <a:r>
+              <a:rPr sz="1400" b="1">
+                <a:solidFill>
+                  <a:srgbClr val="1A2433"/>
+                </a:solidFill>
+                <a:latin typeface="Segoe UI"/>
+              </a:rPr>
+              <a:t>Now the smoke alarm tells you which pan — in JSON.</a:t>
+            </a:r>
+          </a:p>
+        </p:txBody>
+      </p:sp>
     </p:spTree>
   </p:cSld>
   <p:clrMapOvr>
@@ -8444,8 +8487,8 @@
         </p:nvSpPr>
         <p:spPr>
           <a:xfrm>
-            <a:off x="0" y="0"/>
-            <a:ext cx="164592" cy="6858000"/>
+            <a:off x="548640" y="502920"/>
+            <a:ext cx="457200" cy="64008"/>
           </a:xfrm>
           <a:prstGeom prst="rect">
             <a:avLst/>
@@ -8482,19 +8525,119 @@
       </p:sp>
       <p:sp>
         <p:nvSpPr>
-          <p:cNvPr id="4" name="Rounded Rectangle 3"/>
+          <p:cNvPr id="4" name="TextBox 3"/>
+          <p:cNvSpPr txBox="1"/>
+          <p:nvPr/>
+        </p:nvSpPr>
+        <p:spPr>
+          <a:xfrm>
+            <a:off x="548640" y="621792"/>
+            <a:ext cx="7315200" cy="365760"/>
+          </a:xfrm>
+          <a:prstGeom prst="rect">
+            <a:avLst/>
+          </a:prstGeom>
+          <a:noFill/>
+        </p:spPr>
+        <p:txBody>
+          <a:bodyPr wrap="square">
+            <a:spAutoFit/>
+          </a:bodyPr>
+          <a:lstStyle/>
+          <a:p>
+            <a:r>
+              <a:rPr sz="1300" b="1">
+                <a:solidFill>
+                  <a:srgbClr val="00C2A8"/>
+                </a:solidFill>
+                <a:latin typeface="Segoe UI"/>
+              </a:rPr>
+              <a:t>THE CREATOR</a:t>
+            </a:r>
+          </a:p>
+        </p:txBody>
+      </p:sp>
+      <p:sp>
+        <p:nvSpPr>
+          <p:cNvPr id="5" name="TextBox 4"/>
+          <p:cNvSpPr txBox="1"/>
+          <p:nvPr/>
+        </p:nvSpPr>
+        <p:spPr>
+          <a:xfrm>
+            <a:off x="11155680" y="621792"/>
+            <a:ext cx="640080" cy="365760"/>
+          </a:xfrm>
+          <a:prstGeom prst="rect">
+            <a:avLst/>
+          </a:prstGeom>
+          <a:noFill/>
+        </p:spPr>
+        <p:txBody>
+          <a:bodyPr wrap="square">
+            <a:spAutoFit/>
+          </a:bodyPr>
+          <a:lstStyle/>
+          <a:p>
+            <a:r>
+              <a:rPr sz="1300" b="1">
+                <a:solidFill>
+                  <a:srgbClr val="7C8CA0"/>
+                </a:solidFill>
+                <a:latin typeface="Segoe UI"/>
+              </a:rPr>
+              <a:t>13</a:t>
+            </a:r>
+          </a:p>
+        </p:txBody>
+      </p:sp>
+      <p:sp>
+        <p:nvSpPr>
+          <p:cNvPr id="6" name="TextBox 5"/>
+          <p:cNvSpPr txBox="1"/>
+          <p:nvPr/>
+        </p:nvSpPr>
+        <p:spPr>
+          <a:xfrm>
+            <a:off x="548640" y="960120"/>
+            <a:ext cx="11064240" cy="822960"/>
+          </a:xfrm>
+          <a:prstGeom prst="rect">
+            <a:avLst/>
+          </a:prstGeom>
+          <a:noFill/>
+        </p:spPr>
+        <p:txBody>
+          <a:bodyPr wrap="square">
+            <a:spAutoFit/>
+          </a:bodyPr>
+          <a:lstStyle/>
+          <a:p>
+            <a:r>
+              <a:rPr sz="3400" b="1">
+                <a:solidFill>
+                  <a:srgbClr val="FFFFFF"/>
+                </a:solidFill>
+                <a:latin typeface="Segoe UI"/>
+              </a:rPr>
+              <a:t>The engineer behind pncli: Sunny Kolattukudy</a:t>
+            </a:r>
+          </a:p>
+        </p:txBody>
+      </p:sp>
+      <p:sp>
+        <p:nvSpPr>
+          <p:cNvPr id="7" name="Rounded Rectangle 6"/>
           <p:cNvSpPr/>
           <p:nvPr/>
         </p:nvSpPr>
         <p:spPr>
           <a:xfrm>
-            <a:off x="8961120" y="4023360"/>
-            <a:ext cx="5486400" cy="5486400"/>
+            <a:off x="548640" y="1965960"/>
+            <a:ext cx="5440680" cy="4343400"/>
           </a:xfrm>
           <a:prstGeom prst="roundRect">
-            <a:avLst>
-              <a:gd name="adj" fmla="val 50000"/>
-            </a:avLst>
+            <a:avLst/>
           </a:prstGeom>
           <a:solidFill>
             <a:srgbClr val="162740"/>
@@ -8528,14 +8671,58 @@
       </p:sp>
       <p:sp>
         <p:nvSpPr>
-          <p:cNvPr id="5" name="TextBox 4"/>
+          <p:cNvPr id="8" name="Rectangle 7"/>
+          <p:cNvSpPr/>
+          <p:nvPr/>
+        </p:nvSpPr>
+        <p:spPr>
+          <a:xfrm>
+            <a:off x="548640" y="1965960"/>
+            <a:ext cx="82296" cy="4343400"/>
+          </a:xfrm>
+          <a:prstGeom prst="rect">
+            <a:avLst/>
+          </a:prstGeom>
+          <a:solidFill>
+            <a:srgbClr val="00C2A8"/>
+          </a:solidFill>
+          <a:ln>
+            <a:noFill/>
+          </a:ln>
+          <a:effectLst/>
+        </p:spPr>
+        <p:style>
+          <a:lnRef idx="1">
+            <a:schemeClr val="accent1"/>
+          </a:lnRef>
+          <a:fillRef idx="3">
+            <a:schemeClr val="accent1"/>
+          </a:fillRef>
+          <a:effectRef idx="2">
+            <a:schemeClr val="accent1"/>
+          </a:effectRef>
+          <a:fontRef idx="minor">
+            <a:schemeClr val="lt1"/>
+          </a:fontRef>
+        </p:style>
+        <p:txBody>
+          <a:bodyPr rtlCol="0" anchor="ctr"/>
+          <a:lstStyle/>
+          <a:p>
+            <a:pPr algn="ctr"/>
+          </a:p>
+        </p:txBody>
+      </p:sp>
+      <p:sp>
+        <p:nvSpPr>
+          <p:cNvPr id="9" name="TextBox 8"/>
           <p:cNvSpPr txBox="1"/>
           <p:nvPr/>
         </p:nvSpPr>
         <p:spPr>
           <a:xfrm>
-            <a:off x="822960" y="1371600"/>
-            <a:ext cx="10515600" cy="1463040"/>
+            <a:off x="868680" y="2221992"/>
+            <a:ext cx="4846320" cy="457200"/>
           </a:xfrm>
           <a:prstGeom prst="rect">
             <a:avLst/>
@@ -8543,74 +8730,154 @@
           <a:noFill/>
         </p:spPr>
         <p:txBody>
-          <a:bodyPr wrap="square" anchor="t" lIns="0" rIns="0" tIns="0" bIns="0">
+          <a:bodyPr wrap="square">
             <a:spAutoFit/>
           </a:bodyPr>
           <a:lstStyle/>
           <a:p>
-            <a:pPr algn="l">
-              <a:lnSpc>
-                <a:spcPct val="110000"/>
-              </a:lnSpc>
-              <a:spcAft>
-                <a:spcPts val="1000"/>
-              </a:spcAft>
-            </a:pPr>
-            <a:r>
-              <a:rPr sz="4000" b="1">
+            <a:r>
+              <a:rPr sz="2200" b="1">
                 <a:solidFill>
                   <a:srgbClr val="FFFFFF"/>
                 </a:solidFill>
                 <a:latin typeface="Segoe UI"/>
               </a:rPr>
-              <a:t>Seventeen tools. </a:t>
-            </a:r>
-            <a:r>
-              <a:rPr sz="4000" b="1">
+              <a:t>Sunny Kolattukudy</a:t>
+            </a:r>
+          </a:p>
+        </p:txBody>
+      </p:sp>
+      <p:sp>
+        <p:nvSpPr>
+          <p:cNvPr id="10" name="TextBox 9"/>
+          <p:cNvSpPr txBox="1"/>
+          <p:nvPr/>
+        </p:nvSpPr>
+        <p:spPr>
+          <a:xfrm>
+            <a:off x="868680" y="2733040"/>
+            <a:ext cx="4846320" cy="731520"/>
+          </a:xfrm>
+          <a:prstGeom prst="rect">
+            <a:avLst/>
+          </a:prstGeom>
+          <a:noFill/>
+        </p:spPr>
+        <p:txBody>
+          <a:bodyPr wrap="square">
+            <a:spAutoFit/>
+          </a:bodyPr>
+          <a:lstStyle/>
+          <a:p>
+            <a:r>
+              <a:rPr sz="1300" b="1">
                 <a:solidFill>
                   <a:srgbClr val="00C2A8"/>
                 </a:solidFill>
                 <a:latin typeface="Segoe UI"/>
               </a:rPr>
-              <a:t>One interface.</a:t>
-            </a:r>
-          </a:p>
-          <a:p>
-            <a:pPr algn="l">
-              <a:lnSpc>
-                <a:spcPct val="110000"/>
-              </a:lnSpc>
-              <a:spcAft>
-                <a:spcPts val="1000"/>
-              </a:spcAft>
-            </a:pPr>
-            <a:r>
-              <a:rPr sz="2000" b="0">
-                <a:solidFill>
-                  <a:srgbClr val="AFBECF"/>
+              <a:t>Staff Engineer · Developer Experience Guild Leader</a:t>
+            </a:r>
+          </a:p>
+          <a:p>
+            <a:r>
+              <a:rPr sz="1200" b="0">
+                <a:solidFill>
+                  <a:srgbClr val="C5D2E0"/>
                 </a:solidFill>
                 <a:latin typeface="Segoe UI"/>
               </a:rPr>
-              <a:t>Humans and AI agents, finally on the same toolchain.</a:t>
-            </a:r>
-          </a:p>
-        </p:txBody>
-      </p:sp>
-      <p:sp>
-        <p:nvSpPr>
-          <p:cNvPr id="6" name="Rounded Rectangle 5"/>
+              <a:t>Verifiable — Columbus, OH</a:t>
+            </a:r>
+          </a:p>
+        </p:txBody>
+      </p:sp>
+      <p:sp>
+        <p:nvSpPr>
+          <p:cNvPr id="11" name="TextBox 10"/>
+          <p:cNvSpPr txBox="1"/>
+          <p:nvPr/>
+        </p:nvSpPr>
+        <p:spPr>
+          <a:xfrm>
+            <a:off x="868680" y="3648075"/>
+            <a:ext cx="4846320" cy="1966640"/>
+          </a:xfrm>
+          <a:prstGeom prst="rect">
+            <a:avLst/>
+          </a:prstGeom>
+          <a:noFill/>
+        </p:spPr>
+        <p:txBody>
+          <a:bodyPr wrap="square">
+            <a:spAutoFit/>
+          </a:bodyPr>
+          <a:lstStyle/>
+          <a:p>
+            <a:pPr>
+              <a:lnSpc>
+                <a:spcPct val="115000"/>
+              </a:lnSpc>
+            </a:pPr>
+            <a:r>
+              <a:rPr sz="1400" b="0">
+                <a:solidFill>
+                  <a:srgbClr val="C5D2E0"/>
+                </a:solidFill>
+                <a:latin typeface="Segoe UI"/>
+              </a:rPr>
+              <a:t>A career spanning finance, HR tech, and health credentialing. Trained at Case Western Reserve University and Cleveland Clinic's Lerner College of Medicine — bringing medicine's first rule to engineering: understand the problem fully before acting.</a:t>
+            </a:r>
+          </a:p>
+        </p:txBody>
+      </p:sp>
+      <p:sp>
+        <p:nvSpPr>
+          <p:cNvPr id="12" name="TextBox 11"/>
+          <p:cNvSpPr txBox="1"/>
+          <p:nvPr/>
+        </p:nvSpPr>
+        <p:spPr>
+          <a:xfrm>
+            <a:off x="868680" y="5760720"/>
+            <a:ext cx="4846320" cy="365760"/>
+          </a:xfrm>
+          <a:prstGeom prst="rect">
+            <a:avLst/>
+          </a:prstGeom>
+          <a:noFill/>
+        </p:spPr>
+        <p:txBody>
+          <a:bodyPr wrap="square">
+            <a:spAutoFit/>
+          </a:bodyPr>
+          <a:lstStyle/>
+          <a:p>
+            <a:r>
+              <a:rPr sz="1300" b="0">
+                <a:solidFill>
+                  <a:srgbClr val="00C2A8"/>
+                </a:solidFill>
+                <a:latin typeface="Consolas"/>
+              </a:rPr>
+              <a:t>kolatts.github.io</a:t>
+            </a:r>
+          </a:p>
+        </p:txBody>
+      </p:sp>
+      <p:sp>
+        <p:nvSpPr>
+          <p:cNvPr id="13" name="Rounded Rectangle 12"/>
           <p:cNvSpPr/>
           <p:nvPr/>
         </p:nvSpPr>
         <p:spPr>
           <a:xfrm>
-            <a:off x="822960" y="3383280"/>
-            <a:ext cx="3429000" cy="1737360"/>
+            <a:off x="6217920" y="1965960"/>
+            <a:ext cx="5440680" cy="1280160"/>
           </a:xfrm>
           <a:prstGeom prst="roundRect">
-            <a:avLst>
-              <a:gd name="adj" fmla="val 9000"/>
-            </a:avLst>
+            <a:avLst/>
           </a:prstGeom>
           <a:solidFill>
             <a:srgbClr val="162740"/>
@@ -8644,14 +8911,326 @@
       </p:sp>
       <p:sp>
         <p:nvSpPr>
-          <p:cNvPr id="7" name="Rectangle 6"/>
+          <p:cNvPr id="14" name="Rectangle 13"/>
           <p:cNvSpPr/>
           <p:nvPr/>
         </p:nvSpPr>
         <p:spPr>
           <a:xfrm>
-            <a:off x="1097280" y="3675888"/>
-            <a:ext cx="457200" cy="73152"/>
+            <a:off x="6217920" y="1965960"/>
+            <a:ext cx="82296" cy="1280160"/>
+          </a:xfrm>
+          <a:prstGeom prst="rect">
+            <a:avLst/>
+          </a:prstGeom>
+          <a:solidFill>
+            <a:srgbClr val="00C2A8"/>
+          </a:solidFill>
+          <a:ln>
+            <a:noFill/>
+          </a:ln>
+          <a:effectLst/>
+        </p:spPr>
+        <p:style>
+          <a:lnRef idx="1">
+            <a:schemeClr val="accent1"/>
+          </a:lnRef>
+          <a:fillRef idx="3">
+            <a:schemeClr val="accent1"/>
+          </a:fillRef>
+          <a:effectRef idx="2">
+            <a:schemeClr val="accent1"/>
+          </a:effectRef>
+          <a:fontRef idx="minor">
+            <a:schemeClr val="lt1"/>
+          </a:fontRef>
+        </p:style>
+        <p:txBody>
+          <a:bodyPr rtlCol="0" anchor="ctr"/>
+          <a:lstStyle/>
+          <a:p>
+            <a:pPr algn="ctr"/>
+          </a:p>
+        </p:txBody>
+      </p:sp>
+      <p:sp>
+        <p:nvSpPr>
+          <p:cNvPr id="15" name="TextBox 14"/>
+          <p:cNvSpPr txBox="1"/>
+          <p:nvPr/>
+        </p:nvSpPr>
+        <p:spPr>
+          <a:xfrm>
+            <a:off x="6537960" y="2093976"/>
+            <a:ext cx="4846320" cy="365760"/>
+          </a:xfrm>
+          <a:prstGeom prst="rect">
+            <a:avLst/>
+          </a:prstGeom>
+          <a:noFill/>
+        </p:spPr>
+        <p:txBody>
+          <a:bodyPr wrap="square">
+            <a:spAutoFit/>
+          </a:bodyPr>
+          <a:lstStyle/>
+          <a:p>
+            <a:r>
+              <a:rPr sz="1500" b="1">
+                <a:solidFill>
+                  <a:srgbClr val="FFFFFF"/>
+                </a:solidFill>
+                <a:latin typeface="Segoe UI"/>
+              </a:rPr>
+              <a:t>AI-powered code review</a:t>
+            </a:r>
+          </a:p>
+        </p:txBody>
+      </p:sp>
+      <p:sp>
+        <p:nvSpPr>
+          <p:cNvPr id="16" name="TextBox 15"/>
+          <p:cNvSpPr txBox="1"/>
+          <p:nvPr/>
+        </p:nvSpPr>
+        <p:spPr>
+          <a:xfrm>
+            <a:off x="6537960" y="2459736"/>
+            <a:ext cx="4846320" cy="731520"/>
+          </a:xfrm>
+          <a:prstGeom prst="rect">
+            <a:avLst/>
+          </a:prstGeom>
+          <a:noFill/>
+        </p:spPr>
+        <p:txBody>
+          <a:bodyPr wrap="square">
+            <a:spAutoFit/>
+          </a:bodyPr>
+          <a:lstStyle/>
+          <a:p>
+            <a:r>
+              <a:rPr sz="1200" b="0">
+                <a:solidFill>
+                  <a:srgbClr val="C5D2E0"/>
+                </a:solidFill>
+                <a:latin typeface="Segoe UI"/>
+              </a:rPr>
+              <a:t>Built a review pipeline on AWS Bedrock at Verifiable — cutting PR review time by 30+ minutes per pull request.</a:t>
+            </a:r>
+          </a:p>
+        </p:txBody>
+      </p:sp>
+      <p:sp>
+        <p:nvSpPr>
+          <p:cNvPr id="17" name="Rounded Rectangle 16"/>
+          <p:cNvSpPr/>
+          <p:nvPr/>
+        </p:nvSpPr>
+        <p:spPr>
+          <a:xfrm>
+            <a:off x="6217920" y="3497580"/>
+            <a:ext cx="5440680" cy="1280160"/>
+          </a:xfrm>
+          <a:prstGeom prst="roundRect">
+            <a:avLst/>
+          </a:prstGeom>
+          <a:solidFill>
+            <a:srgbClr val="162740"/>
+          </a:solidFill>
+          <a:ln>
+            <a:noFill/>
+          </a:ln>
+          <a:effectLst/>
+        </p:spPr>
+        <p:style>
+          <a:lnRef idx="1">
+            <a:schemeClr val="accent1"/>
+          </a:lnRef>
+          <a:fillRef idx="3">
+            <a:schemeClr val="accent1"/>
+          </a:fillRef>
+          <a:effectRef idx="2">
+            <a:schemeClr val="accent1"/>
+          </a:effectRef>
+          <a:fontRef idx="minor">
+            <a:schemeClr val="lt1"/>
+          </a:fontRef>
+        </p:style>
+        <p:txBody>
+          <a:bodyPr rtlCol="0" anchor="ctr"/>
+          <a:lstStyle/>
+          <a:p>
+            <a:pPr algn="ctr"/>
+          </a:p>
+        </p:txBody>
+      </p:sp>
+      <p:sp>
+        <p:nvSpPr>
+          <p:cNvPr id="18" name="Rectangle 17"/>
+          <p:cNvSpPr/>
+          <p:nvPr/>
+        </p:nvSpPr>
+        <p:spPr>
+          <a:xfrm>
+            <a:off x="6217920" y="3497580"/>
+            <a:ext cx="82296" cy="1280160"/>
+          </a:xfrm>
+          <a:prstGeom prst="rect">
+            <a:avLst/>
+          </a:prstGeom>
+          <a:solidFill>
+            <a:srgbClr val="00C2A8"/>
+          </a:solidFill>
+          <a:ln>
+            <a:noFill/>
+          </a:ln>
+          <a:effectLst/>
+        </p:spPr>
+        <p:style>
+          <a:lnRef idx="1">
+            <a:schemeClr val="accent1"/>
+          </a:lnRef>
+          <a:fillRef idx="3">
+            <a:schemeClr val="accent1"/>
+          </a:fillRef>
+          <a:effectRef idx="2">
+            <a:schemeClr val="accent1"/>
+          </a:effectRef>
+          <a:fontRef idx="minor">
+            <a:schemeClr val="lt1"/>
+          </a:fontRef>
+        </p:style>
+        <p:txBody>
+          <a:bodyPr rtlCol="0" anchor="ctr"/>
+          <a:lstStyle/>
+          <a:p>
+            <a:pPr algn="ctr"/>
+          </a:p>
+        </p:txBody>
+      </p:sp>
+      <p:sp>
+        <p:nvSpPr>
+          <p:cNvPr id="19" name="TextBox 18"/>
+          <p:cNvSpPr txBox="1"/>
+          <p:nvPr/>
+        </p:nvSpPr>
+        <p:spPr>
+          <a:xfrm>
+            <a:off x="6537960" y="3625596"/>
+            <a:ext cx="4846320" cy="365760"/>
+          </a:xfrm>
+          <a:prstGeom prst="rect">
+            <a:avLst/>
+          </a:prstGeom>
+          <a:noFill/>
+        </p:spPr>
+        <p:txBody>
+          <a:bodyPr wrap="square">
+            <a:spAutoFit/>
+          </a:bodyPr>
+          <a:lstStyle/>
+          <a:p>
+            <a:r>
+              <a:rPr sz="1500" b="1">
+                <a:solidFill>
+                  <a:srgbClr val="FFFFFF"/>
+                </a:solidFill>
+                <a:latin typeface="Segoe UI"/>
+              </a:rPr>
+              <a:t>Agentic engineering systems</a:t>
+            </a:r>
+          </a:p>
+        </p:txBody>
+      </p:sp>
+      <p:sp>
+        <p:nvSpPr>
+          <p:cNvPr id="20" name="TextBox 19"/>
+          <p:cNvSpPr txBox="1"/>
+          <p:nvPr/>
+        </p:nvSpPr>
+        <p:spPr>
+          <a:xfrm>
+            <a:off x="6537960" y="3991356"/>
+            <a:ext cx="4846320" cy="731520"/>
+          </a:xfrm>
+          <a:prstGeom prst="rect">
+            <a:avLst/>
+          </a:prstGeom>
+          <a:noFill/>
+        </p:spPr>
+        <p:txBody>
+          <a:bodyPr wrap="square">
+            <a:spAutoFit/>
+          </a:bodyPr>
+          <a:lstStyle/>
+          <a:p>
+            <a:r>
+              <a:rPr sz="1200" b="0">
+                <a:solidFill>
+                  <a:srgbClr val="C5D2E0"/>
+                </a:solidFill>
+                <a:latin typeface="Segoe UI"/>
+              </a:rPr>
+              <a:t>Specializes in the scaffolding that makes teams move faster: review pipelines, plugin marketplaces, and pncli itself.</a:t>
+            </a:r>
+          </a:p>
+        </p:txBody>
+      </p:sp>
+      <p:sp>
+        <p:nvSpPr>
+          <p:cNvPr id="21" name="Rounded Rectangle 20"/>
+          <p:cNvSpPr/>
+          <p:nvPr/>
+        </p:nvSpPr>
+        <p:spPr>
+          <a:xfrm>
+            <a:off x="6217920" y="5029200"/>
+            <a:ext cx="5440680" cy="1280160"/>
+          </a:xfrm>
+          <a:prstGeom prst="roundRect">
+            <a:avLst/>
+          </a:prstGeom>
+          <a:solidFill>
+            <a:srgbClr val="162740"/>
+          </a:solidFill>
+          <a:ln>
+            <a:noFill/>
+          </a:ln>
+          <a:effectLst/>
+        </p:spPr>
+        <p:style>
+          <a:lnRef idx="1">
+            <a:schemeClr val="accent1"/>
+          </a:lnRef>
+          <a:fillRef idx="3">
+            <a:schemeClr val="accent1"/>
+          </a:fillRef>
+          <a:effectRef idx="2">
+            <a:schemeClr val="accent1"/>
+          </a:effectRef>
+          <a:fontRef idx="minor">
+            <a:schemeClr val="lt1"/>
+          </a:fontRef>
+        </p:style>
+        <p:txBody>
+          <a:bodyPr rtlCol="0" anchor="ctr"/>
+          <a:lstStyle/>
+          <a:p>
+            <a:pPr algn="ctr"/>
+          </a:p>
+        </p:txBody>
+      </p:sp>
+      <p:sp>
+        <p:nvSpPr>
+          <p:cNvPr id="22" name="Rectangle 21"/>
+          <p:cNvSpPr/>
+          <p:nvPr/>
+        </p:nvSpPr>
+        <p:spPr>
+          <a:xfrm>
+            <a:off x="6217920" y="5029200"/>
+            <a:ext cx="82296" cy="1280160"/>
           </a:xfrm>
           <a:prstGeom prst="rect">
             <a:avLst/>
@@ -8688,14 +9267,14 @@
       </p:sp>
       <p:sp>
         <p:nvSpPr>
-          <p:cNvPr id="8" name="TextBox 7"/>
+          <p:cNvPr id="23" name="TextBox 22"/>
           <p:cNvSpPr txBox="1"/>
           <p:nvPr/>
         </p:nvSpPr>
         <p:spPr>
           <a:xfrm>
-            <a:off x="1097280" y="3858768"/>
-            <a:ext cx="2880360" cy="457200"/>
+            <a:off x="6537960" y="5157216"/>
+            <a:ext cx="4846320" cy="365760"/>
           </a:xfrm>
           <a:prstGeom prst="rect">
             <a:avLst/>
@@ -8703,38 +9282,33 @@
           <a:noFill/>
         </p:spPr>
         <p:txBody>
-          <a:bodyPr wrap="square" anchor="t" lIns="0" rIns="0" tIns="0" bIns="0">
+          <a:bodyPr wrap="square">
             <a:spAutoFit/>
           </a:bodyPr>
           <a:lstStyle/>
           <a:p>
-            <a:pPr algn="l">
-              <a:lnSpc>
-                <a:spcPct val="100000"/>
-              </a:lnSpc>
-            </a:pPr>
-            <a:r>
-              <a:rPr sz="1700" b="1">
+            <a:r>
+              <a:rPr sz="1500" b="1">
                 <a:solidFill>
                   <a:srgbClr val="FFFFFF"/>
                 </a:solidFill>
                 <a:latin typeface="Segoe UI"/>
               </a:rPr>
-              <a:t>Pilot it</a:t>
-            </a:r>
-          </a:p>
-        </p:txBody>
-      </p:sp>
-      <p:sp>
-        <p:nvSpPr>
-          <p:cNvPr id="9" name="TextBox 8"/>
+              <a:t>More than code</a:t>
+            </a:r>
+          </a:p>
+        </p:txBody>
+      </p:sp>
+      <p:sp>
+        <p:nvSpPr>
+          <p:cNvPr id="24" name="TextBox 23"/>
           <p:cNvSpPr txBox="1"/>
           <p:nvPr/>
         </p:nvSpPr>
         <p:spPr>
           <a:xfrm>
-            <a:off x="1097280" y="4297680"/>
-            <a:ext cx="2880360" cy="731520"/>
+            <a:off x="6537960" y="5522976"/>
+            <a:ext cx="4846320" cy="731520"/>
           </a:xfrm>
           <a:prstGeom prst="rect">
             <a:avLst/>
@@ -8742,16 +9316,11 @@
           <a:noFill/>
         </p:spPr>
         <p:txBody>
-          <a:bodyPr wrap="square" anchor="t" lIns="0" rIns="0" tIns="0" bIns="0">
+          <a:bodyPr wrap="square">
             <a:spAutoFit/>
           </a:bodyPr>
           <a:lstStyle/>
           <a:p>
-            <a:pPr algn="l">
-              <a:lnSpc>
-                <a:spcPct val="115000"/>
-              </a:lnSpc>
-            </a:pPr>
             <a:r>
               <a:rPr sz="1200" b="0">
                 <a:solidFill>
@@ -8759,391 +9328,7 @@
                 </a:solidFill>
                 <a:latin typeface="Segoe UI"/>
               </a:rPr>
-              <a:t>One team, one sprint: identity + tracker + source control + config test.</a:t>
-            </a:r>
-          </a:p>
-        </p:txBody>
-      </p:sp>
-      <p:sp>
-        <p:nvSpPr>
-          <p:cNvPr id="10" name="Rounded Rectangle 9"/>
-          <p:cNvSpPr/>
-          <p:nvPr/>
-        </p:nvSpPr>
-        <p:spPr>
-          <a:xfrm>
-            <a:off x="4480560" y="3383280"/>
-            <a:ext cx="3429000" cy="1737360"/>
-          </a:xfrm>
-          <a:prstGeom prst="roundRect">
-            <a:avLst>
-              <a:gd name="adj" fmla="val 9000"/>
-            </a:avLst>
-          </a:prstGeom>
-          <a:solidFill>
-            <a:srgbClr val="162740"/>
-          </a:solidFill>
-          <a:ln>
-            <a:noFill/>
-          </a:ln>
-          <a:effectLst/>
-        </p:spPr>
-        <p:style>
-          <a:lnRef idx="1">
-            <a:schemeClr val="accent1"/>
-          </a:lnRef>
-          <a:fillRef idx="3">
-            <a:schemeClr val="accent1"/>
-          </a:fillRef>
-          <a:effectRef idx="2">
-            <a:schemeClr val="accent1"/>
-          </a:effectRef>
-          <a:fontRef idx="minor">
-            <a:schemeClr val="lt1"/>
-          </a:fontRef>
-        </p:style>
-        <p:txBody>
-          <a:bodyPr rtlCol="0" anchor="ctr"/>
-          <a:lstStyle/>
-          <a:p>
-            <a:pPr algn="ctr"/>
-          </a:p>
-        </p:txBody>
-      </p:sp>
-      <p:sp>
-        <p:nvSpPr>
-          <p:cNvPr id="11" name="Rectangle 10"/>
-          <p:cNvSpPr/>
-          <p:nvPr/>
-        </p:nvSpPr>
-        <p:spPr>
-          <a:xfrm>
-            <a:off x="4754880" y="3675888"/>
-            <a:ext cx="457200" cy="73152"/>
-          </a:xfrm>
-          <a:prstGeom prst="rect">
-            <a:avLst/>
-          </a:prstGeom>
-          <a:solidFill>
-            <a:srgbClr val="FFB454"/>
-          </a:solidFill>
-          <a:ln>
-            <a:noFill/>
-          </a:ln>
-          <a:effectLst/>
-        </p:spPr>
-        <p:style>
-          <a:lnRef idx="1">
-            <a:schemeClr val="accent1"/>
-          </a:lnRef>
-          <a:fillRef idx="3">
-            <a:schemeClr val="accent1"/>
-          </a:fillRef>
-          <a:effectRef idx="2">
-            <a:schemeClr val="accent1"/>
-          </a:effectRef>
-          <a:fontRef idx="minor">
-            <a:schemeClr val="lt1"/>
-          </a:fontRef>
-        </p:style>
-        <p:txBody>
-          <a:bodyPr rtlCol="0" anchor="ctr"/>
-          <a:lstStyle/>
-          <a:p>
-            <a:pPr algn="ctr"/>
-          </a:p>
-        </p:txBody>
-      </p:sp>
-      <p:sp>
-        <p:nvSpPr>
-          <p:cNvPr id="12" name="TextBox 11"/>
-          <p:cNvSpPr txBox="1"/>
-          <p:nvPr/>
-        </p:nvSpPr>
-        <p:spPr>
-          <a:xfrm>
-            <a:off x="4754880" y="3858768"/>
-            <a:ext cx="2880360" cy="457200"/>
-          </a:xfrm>
-          <a:prstGeom prst="rect">
-            <a:avLst/>
-          </a:prstGeom>
-          <a:noFill/>
-        </p:spPr>
-        <p:txBody>
-          <a:bodyPr wrap="square" anchor="t" lIns="0" rIns="0" tIns="0" bIns="0">
-            <a:spAutoFit/>
-          </a:bodyPr>
-          <a:lstStyle/>
-          <a:p>
-            <a:pPr algn="l">
-              <a:lnSpc>
-                <a:spcPct val="100000"/>
-              </a:lnSpc>
-            </a:pPr>
-            <a:r>
-              <a:rPr sz="1700" b="1">
-                <a:solidFill>
-                  <a:srgbClr val="FFFFFF"/>
-                </a:solidFill>
-                <a:latin typeface="Segoe UI"/>
-              </a:rPr>
-              <a:t>Wire in an agent</a:t>
-            </a:r>
-          </a:p>
-        </p:txBody>
-      </p:sp>
-      <p:sp>
-        <p:nvSpPr>
-          <p:cNvPr id="13" name="TextBox 12"/>
-          <p:cNvSpPr txBox="1"/>
-          <p:nvPr/>
-        </p:nvSpPr>
-        <p:spPr>
-          <a:xfrm>
-            <a:off x="4754880" y="4297680"/>
-            <a:ext cx="2880360" cy="731520"/>
-          </a:xfrm>
-          <a:prstGeom prst="rect">
-            <a:avLst/>
-          </a:prstGeom>
-          <a:noFill/>
-        </p:spPr>
-        <p:txBody>
-          <a:bodyPr wrap="square" anchor="t" lIns="0" rIns="0" tIns="0" bIns="0">
-            <a:spAutoFit/>
-          </a:bodyPr>
-          <a:lstStyle/>
-          <a:p>
-            <a:pPr algn="l">
-              <a:lnSpc>
-                <a:spcPct val="115000"/>
-              </a:lnSpc>
-            </a:pPr>
-            <a:r>
-              <a:rPr sz="1200" b="0">
-                <a:solidFill>
-                  <a:srgbClr val="C5D2E0"/>
-                </a:solidFill>
-                <a:latin typeface="Segoe UI"/>
-              </a:rPr>
-              <a:t>Point your coding agent at pncli for tickets, PRs, and prod checks.</a:t>
-            </a:r>
-          </a:p>
-        </p:txBody>
-      </p:sp>
-      <p:sp>
-        <p:nvSpPr>
-          <p:cNvPr id="14" name="Rounded Rectangle 13"/>
-          <p:cNvSpPr/>
-          <p:nvPr/>
-        </p:nvSpPr>
-        <p:spPr>
-          <a:xfrm>
-            <a:off x="8138160" y="3383280"/>
-            <a:ext cx="3429000" cy="1737360"/>
-          </a:xfrm>
-          <a:prstGeom prst="roundRect">
-            <a:avLst>
-              <a:gd name="adj" fmla="val 9000"/>
-            </a:avLst>
-          </a:prstGeom>
-          <a:solidFill>
-            <a:srgbClr val="162740"/>
-          </a:solidFill>
-          <a:ln>
-            <a:noFill/>
-          </a:ln>
-          <a:effectLst/>
-        </p:spPr>
-        <p:style>
-          <a:lnRef idx="1">
-            <a:schemeClr val="accent1"/>
-          </a:lnRef>
-          <a:fillRef idx="3">
-            <a:schemeClr val="accent1"/>
-          </a:fillRef>
-          <a:effectRef idx="2">
-            <a:schemeClr val="accent1"/>
-          </a:effectRef>
-          <a:fontRef idx="minor">
-            <a:schemeClr val="lt1"/>
-          </a:fontRef>
-        </p:style>
-        <p:txBody>
-          <a:bodyPr rtlCol="0" anchor="ctr"/>
-          <a:lstStyle/>
-          <a:p>
-            <a:pPr algn="ctr"/>
-          </a:p>
-        </p:txBody>
-      </p:sp>
-      <p:sp>
-        <p:nvSpPr>
-          <p:cNvPr id="15" name="Rectangle 14"/>
-          <p:cNvSpPr/>
-          <p:nvPr/>
-        </p:nvSpPr>
-        <p:spPr>
-          <a:xfrm>
-            <a:off x="8412480" y="3675888"/>
-            <a:ext cx="457200" cy="73152"/>
-          </a:xfrm>
-          <a:prstGeom prst="rect">
-            <a:avLst/>
-          </a:prstGeom>
-          <a:solidFill>
-            <a:srgbClr val="FFB454"/>
-          </a:solidFill>
-          <a:ln>
-            <a:noFill/>
-          </a:ln>
-          <a:effectLst/>
-        </p:spPr>
-        <p:style>
-          <a:lnRef idx="1">
-            <a:schemeClr val="accent1"/>
-          </a:lnRef>
-          <a:fillRef idx="3">
-            <a:schemeClr val="accent1"/>
-          </a:fillRef>
-          <a:effectRef idx="2">
-            <a:schemeClr val="accent1"/>
-          </a:effectRef>
-          <a:fontRef idx="minor">
-            <a:schemeClr val="lt1"/>
-          </a:fontRef>
-        </p:style>
-        <p:txBody>
-          <a:bodyPr rtlCol="0" anchor="ctr"/>
-          <a:lstStyle/>
-          <a:p>
-            <a:pPr algn="ctr"/>
-          </a:p>
-        </p:txBody>
-      </p:sp>
-      <p:sp>
-        <p:nvSpPr>
-          <p:cNvPr id="16" name="TextBox 15"/>
-          <p:cNvSpPr txBox="1"/>
-          <p:nvPr/>
-        </p:nvSpPr>
-        <p:spPr>
-          <a:xfrm>
-            <a:off x="8412480" y="3858768"/>
-            <a:ext cx="2880360" cy="457200"/>
-          </a:xfrm>
-          <a:prstGeom prst="rect">
-            <a:avLst/>
-          </a:prstGeom>
-          <a:noFill/>
-        </p:spPr>
-        <p:txBody>
-          <a:bodyPr wrap="square" anchor="t" lIns="0" rIns="0" tIns="0" bIns="0">
-            <a:spAutoFit/>
-          </a:bodyPr>
-          <a:lstStyle/>
-          <a:p>
-            <a:pPr algn="l">
-              <a:lnSpc>
-                <a:spcPct val="100000"/>
-              </a:lnSpc>
-            </a:pPr>
-            <a:r>
-              <a:rPr sz="1700" b="1">
-                <a:solidFill>
-                  <a:srgbClr val="FFFFFF"/>
-                </a:solidFill>
-                <a:latin typeface="Segoe UI"/>
-              </a:rPr>
-              <a:t>Seed the marketplace</a:t>
-            </a:r>
-          </a:p>
-        </p:txBody>
-      </p:sp>
-      <p:sp>
-        <p:nvSpPr>
-          <p:cNvPr id="17" name="TextBox 16"/>
-          <p:cNvSpPr txBox="1"/>
-          <p:nvPr/>
-        </p:nvSpPr>
-        <p:spPr>
-          <a:xfrm>
-            <a:off x="8412480" y="4297680"/>
-            <a:ext cx="2880360" cy="731520"/>
-          </a:xfrm>
-          <a:prstGeom prst="rect">
-            <a:avLst/>
-          </a:prstGeom>
-          <a:noFill/>
-        </p:spPr>
-        <p:txBody>
-          <a:bodyPr wrap="square" anchor="t" lIns="0" rIns="0" tIns="0" bIns="0">
-            <a:spAutoFit/>
-          </a:bodyPr>
-          <a:lstStyle/>
-          <a:p>
-            <a:pPr algn="l">
-              <a:lnSpc>
-                <a:spcPct val="115000"/>
-              </a:lnSpc>
-            </a:pPr>
-            <a:r>
-              <a:rPr sz="1200" b="0">
-                <a:solidFill>
-                  <a:srgbClr val="C5D2E0"/>
-                </a:solidFill>
-                <a:latin typeface="Segoe UI"/>
-              </a:rPr>
-              <a:t>Stand up an internal skills repo and publish your first team skill.</a:t>
-            </a:r>
-          </a:p>
-        </p:txBody>
-      </p:sp>
-      <p:sp>
-        <p:nvSpPr>
-          <p:cNvPr id="18" name="TextBox 17"/>
-          <p:cNvSpPr txBox="1"/>
-          <p:nvPr/>
-        </p:nvSpPr>
-        <p:spPr>
-          <a:xfrm>
-            <a:off x="822960" y="5760720"/>
-            <a:ext cx="10058400" cy="457200"/>
-          </a:xfrm>
-          <a:prstGeom prst="rect">
-            <a:avLst/>
-          </a:prstGeom>
-          <a:noFill/>
-        </p:spPr>
-        <p:txBody>
-          <a:bodyPr wrap="square" anchor="t" lIns="0" rIns="0" tIns="0" bIns="0">
-            <a:spAutoFit/>
-          </a:bodyPr>
-          <a:lstStyle/>
-          <a:p>
-            <a:pPr algn="l">
-              <a:lnSpc>
-                <a:spcPct val="100000"/>
-              </a:lnSpc>
-            </a:pPr>
-            <a:r>
-              <a:rPr sz="1600" b="1">
-                <a:solidFill>
-                  <a:srgbClr val="00C2A8"/>
-                </a:solidFill>
-                <a:latin typeface="Consolas"/>
-              </a:rPr>
-              <a:t>pncli config test</a:t>
-            </a:r>
-            <a:r>
-              <a:rPr sz="1600" b="0">
-                <a:solidFill>
-                  <a:srgbClr val="AFBECF"/>
-                </a:solidFill>
-                <a:latin typeface="Segoe UI"/>
-              </a:rPr>
-              <a:t>   —   green across the board is ten minutes away.</a:t>
+              <a:t>Mentors engineers across organizations — and co-founded melodic thrash band Deadiron, where high-functioning teams are a stage skill too.</a:t>
             </a:r>
           </a:p>
         </p:txBody>
@@ -9218,8 +9403,8 @@
         </p:nvSpPr>
         <p:spPr>
           <a:xfrm>
-            <a:off x="548640" y="502920"/>
-            <a:ext cx="457200" cy="64008"/>
+            <a:off x="0" y="0"/>
+            <a:ext cx="164592" cy="6858000"/>
           </a:xfrm>
           <a:prstGeom prst="rect">
             <a:avLst/>
@@ -9256,119 +9441,19 @@
       </p:sp>
       <p:sp>
         <p:nvSpPr>
-          <p:cNvPr id="4" name="TextBox 3"/>
-          <p:cNvSpPr txBox="1"/>
-          <p:nvPr/>
-        </p:nvSpPr>
-        <p:spPr>
-          <a:xfrm>
-            <a:off x="548640" y="621792"/>
-            <a:ext cx="7315200" cy="365760"/>
-          </a:xfrm>
-          <a:prstGeom prst="rect">
-            <a:avLst/>
-          </a:prstGeom>
-          <a:noFill/>
-        </p:spPr>
-        <p:txBody>
-          <a:bodyPr wrap="square">
-            <a:spAutoFit/>
-          </a:bodyPr>
-          <a:lstStyle/>
-          <a:p>
-            <a:r>
-              <a:rPr sz="1300" b="1">
-                <a:solidFill>
-                  <a:srgbClr val="00C2A8"/>
-                </a:solidFill>
-                <a:latin typeface="Segoe UI"/>
-              </a:rPr>
-              <a:t>THE CREATOR</a:t>
-            </a:r>
-          </a:p>
-        </p:txBody>
-      </p:sp>
-      <p:sp>
-        <p:nvSpPr>
-          <p:cNvPr id="5" name="TextBox 4"/>
-          <p:cNvSpPr txBox="1"/>
-          <p:nvPr/>
-        </p:nvSpPr>
-        <p:spPr>
-          <a:xfrm>
-            <a:off x="11155680" y="621792"/>
-            <a:ext cx="640080" cy="365760"/>
-          </a:xfrm>
-          <a:prstGeom prst="rect">
-            <a:avLst/>
-          </a:prstGeom>
-          <a:noFill/>
-        </p:spPr>
-        <p:txBody>
-          <a:bodyPr wrap="square">
-            <a:spAutoFit/>
-          </a:bodyPr>
-          <a:lstStyle/>
-          <a:p>
-            <a:r>
-              <a:rPr sz="1300" b="1">
-                <a:solidFill>
-                  <a:srgbClr val="7C8CA0"/>
-                </a:solidFill>
-                <a:latin typeface="Segoe UI"/>
-              </a:rPr>
-              <a:t>13</a:t>
-            </a:r>
-          </a:p>
-        </p:txBody>
-      </p:sp>
-      <p:sp>
-        <p:nvSpPr>
-          <p:cNvPr id="6" name="TextBox 5"/>
-          <p:cNvSpPr txBox="1"/>
-          <p:nvPr/>
-        </p:nvSpPr>
-        <p:spPr>
-          <a:xfrm>
-            <a:off x="548640" y="960120"/>
-            <a:ext cx="11064240" cy="822960"/>
-          </a:xfrm>
-          <a:prstGeom prst="rect">
-            <a:avLst/>
-          </a:prstGeom>
-          <a:noFill/>
-        </p:spPr>
-        <p:txBody>
-          <a:bodyPr wrap="square">
-            <a:spAutoFit/>
-          </a:bodyPr>
-          <a:lstStyle/>
-          <a:p>
-            <a:r>
-              <a:rPr sz="3400" b="1">
-                <a:solidFill>
-                  <a:srgbClr val="FFFFFF"/>
-                </a:solidFill>
-                <a:latin typeface="Segoe UI"/>
-              </a:rPr>
-              <a:t>The engineer behind pncli: Sunny Kolattukudy</a:t>
-            </a:r>
-          </a:p>
-        </p:txBody>
-      </p:sp>
-      <p:sp>
-        <p:nvSpPr>
-          <p:cNvPr id="7" name="Rounded Rectangle 6"/>
+          <p:cNvPr id="4" name="Rounded Rectangle 3"/>
           <p:cNvSpPr/>
           <p:nvPr/>
         </p:nvSpPr>
         <p:spPr>
           <a:xfrm>
-            <a:off x="548640" y="1965960"/>
-            <a:ext cx="5440680" cy="4343400"/>
+            <a:off x="8961120" y="4023360"/>
+            <a:ext cx="5486400" cy="5486400"/>
           </a:xfrm>
           <a:prstGeom prst="roundRect">
-            <a:avLst/>
+            <a:avLst>
+              <a:gd name="adj" fmla="val 50000"/>
+            </a:avLst>
           </a:prstGeom>
           <a:solidFill>
             <a:srgbClr val="162740"/>
@@ -9402,58 +9487,14 @@
       </p:sp>
       <p:sp>
         <p:nvSpPr>
-          <p:cNvPr id="8" name="Rectangle 7"/>
-          <p:cNvSpPr/>
-          <p:nvPr/>
-        </p:nvSpPr>
-        <p:spPr>
-          <a:xfrm>
-            <a:off x="548640" y="1965960"/>
-            <a:ext cx="82296" cy="4343400"/>
-          </a:xfrm>
-          <a:prstGeom prst="rect">
-            <a:avLst/>
-          </a:prstGeom>
-          <a:solidFill>
-            <a:srgbClr val="00C2A8"/>
-          </a:solidFill>
-          <a:ln>
-            <a:noFill/>
-          </a:ln>
-          <a:effectLst/>
-        </p:spPr>
-        <p:style>
-          <a:lnRef idx="1">
-            <a:schemeClr val="accent1"/>
-          </a:lnRef>
-          <a:fillRef idx="3">
-            <a:schemeClr val="accent1"/>
-          </a:fillRef>
-          <a:effectRef idx="2">
-            <a:schemeClr val="accent1"/>
-          </a:effectRef>
-          <a:fontRef idx="minor">
-            <a:schemeClr val="lt1"/>
-          </a:fontRef>
-        </p:style>
-        <p:txBody>
-          <a:bodyPr rtlCol="0" anchor="ctr"/>
-          <a:lstStyle/>
-          <a:p>
-            <a:pPr algn="ctr"/>
-          </a:p>
-        </p:txBody>
-      </p:sp>
-      <p:sp>
-        <p:nvSpPr>
-          <p:cNvPr id="9" name="TextBox 8"/>
+          <p:cNvPr id="5" name="TextBox 4"/>
           <p:cNvSpPr txBox="1"/>
           <p:nvPr/>
         </p:nvSpPr>
         <p:spPr>
           <a:xfrm>
-            <a:off x="868680" y="2221992"/>
-            <a:ext cx="4846320" cy="457200"/>
+            <a:off x="822960" y="1371600"/>
+            <a:ext cx="10515600" cy="1463040"/>
           </a:xfrm>
           <a:prstGeom prst="rect">
             <a:avLst/>
@@ -9461,154 +9502,74 @@
           <a:noFill/>
         </p:spPr>
         <p:txBody>
-          <a:bodyPr wrap="square">
+          <a:bodyPr wrap="square" anchor="t" lIns="0" rIns="0" tIns="0" bIns="0">
             <a:spAutoFit/>
           </a:bodyPr>
           <a:lstStyle/>
           <a:p>
-            <a:r>
-              <a:rPr sz="2200" b="1">
+            <a:pPr algn="l">
+              <a:lnSpc>
+                <a:spcPct val="110000"/>
+              </a:lnSpc>
+              <a:spcAft>
+                <a:spcPts val="1000"/>
+              </a:spcAft>
+            </a:pPr>
+            <a:r>
+              <a:rPr sz="4000" b="1">
                 <a:solidFill>
                   <a:srgbClr val="FFFFFF"/>
                 </a:solidFill>
                 <a:latin typeface="Segoe UI"/>
               </a:rPr>
-              <a:t>Sunny Kolattukudy</a:t>
-            </a:r>
-          </a:p>
-        </p:txBody>
-      </p:sp>
-      <p:sp>
-        <p:nvSpPr>
-          <p:cNvPr id="10" name="TextBox 9"/>
-          <p:cNvSpPr txBox="1"/>
-          <p:nvPr/>
-        </p:nvSpPr>
-        <p:spPr>
-          <a:xfrm>
-            <a:off x="868680" y="2733040"/>
-            <a:ext cx="4846320" cy="731520"/>
-          </a:xfrm>
-          <a:prstGeom prst="rect">
-            <a:avLst/>
-          </a:prstGeom>
-          <a:noFill/>
-        </p:spPr>
-        <p:txBody>
-          <a:bodyPr wrap="square">
-            <a:spAutoFit/>
-          </a:bodyPr>
-          <a:lstStyle/>
-          <a:p>
-            <a:r>
-              <a:rPr sz="1300" b="1">
+              <a:t>Seventeen tools. </a:t>
+            </a:r>
+            <a:r>
+              <a:rPr sz="4000" b="1">
                 <a:solidFill>
                   <a:srgbClr val="00C2A8"/>
                 </a:solidFill>
                 <a:latin typeface="Segoe UI"/>
               </a:rPr>
-              <a:t>Staff Engineer · Developer Experience Guild Leader</a:t>
-            </a:r>
-          </a:p>
-          <a:p>
-            <a:r>
-              <a:rPr sz="1200" b="0">
-                <a:solidFill>
-                  <a:srgbClr val="C5D2E0"/>
+              <a:t>One interface.</a:t>
+            </a:r>
+          </a:p>
+          <a:p>
+            <a:pPr algn="l">
+              <a:lnSpc>
+                <a:spcPct val="110000"/>
+              </a:lnSpc>
+              <a:spcAft>
+                <a:spcPts val="1000"/>
+              </a:spcAft>
+            </a:pPr>
+            <a:r>
+              <a:rPr sz="2000" b="0">
+                <a:solidFill>
+                  <a:srgbClr val="AFBECF"/>
                 </a:solidFill>
                 <a:latin typeface="Segoe UI"/>
               </a:rPr>
-              <a:t>Verifiable — Columbus, OH</a:t>
-            </a:r>
-          </a:p>
-        </p:txBody>
-      </p:sp>
-      <p:sp>
-        <p:nvSpPr>
-          <p:cNvPr id="11" name="TextBox 10"/>
-          <p:cNvSpPr txBox="1"/>
-          <p:nvPr/>
-        </p:nvSpPr>
-        <p:spPr>
-          <a:xfrm>
-            <a:off x="868680" y="3648075"/>
-            <a:ext cx="4846320" cy="1966640"/>
-          </a:xfrm>
-          <a:prstGeom prst="rect">
-            <a:avLst/>
-          </a:prstGeom>
-          <a:noFill/>
-        </p:spPr>
-        <p:txBody>
-          <a:bodyPr wrap="square">
-            <a:spAutoFit/>
-          </a:bodyPr>
-          <a:lstStyle/>
-          <a:p>
-            <a:pPr>
-              <a:lnSpc>
-                <a:spcPct val="115000"/>
-              </a:lnSpc>
-            </a:pPr>
-            <a:r>
-              <a:rPr sz="1400" b="0">
-                <a:solidFill>
-                  <a:srgbClr val="C5D2E0"/>
-                </a:solidFill>
-                <a:latin typeface="Segoe UI"/>
-              </a:rPr>
-              <a:t>A career spanning finance, HR tech, and health credentialing. Trained at Case Western Reserve University and Cleveland Clinic's Lerner College of Medicine — bringing medicine's first rule to engineering: understand the problem fully before acting.</a:t>
-            </a:r>
-          </a:p>
-        </p:txBody>
-      </p:sp>
-      <p:sp>
-        <p:nvSpPr>
-          <p:cNvPr id="12" name="TextBox 11"/>
-          <p:cNvSpPr txBox="1"/>
-          <p:nvPr/>
-        </p:nvSpPr>
-        <p:spPr>
-          <a:xfrm>
-            <a:off x="868680" y="5760720"/>
-            <a:ext cx="4846320" cy="365760"/>
-          </a:xfrm>
-          <a:prstGeom prst="rect">
-            <a:avLst/>
-          </a:prstGeom>
-          <a:noFill/>
-        </p:spPr>
-        <p:txBody>
-          <a:bodyPr wrap="square">
-            <a:spAutoFit/>
-          </a:bodyPr>
-          <a:lstStyle/>
-          <a:p>
-            <a:r>
-              <a:rPr sz="1300" b="0">
-                <a:solidFill>
-                  <a:srgbClr val="00C2A8"/>
-                </a:solidFill>
-                <a:latin typeface="Consolas"/>
-              </a:rPr>
-              <a:t>kolatts.github.io</a:t>
-            </a:r>
-          </a:p>
-        </p:txBody>
-      </p:sp>
-      <p:sp>
-        <p:nvSpPr>
-          <p:cNvPr id="13" name="Rounded Rectangle 12"/>
+              <a:t>Humans and AI agents, finally on the same toolchain.</a:t>
+            </a:r>
+          </a:p>
+        </p:txBody>
+      </p:sp>
+      <p:sp>
+        <p:nvSpPr>
+          <p:cNvPr id="6" name="Rounded Rectangle 5"/>
           <p:cNvSpPr/>
           <p:nvPr/>
         </p:nvSpPr>
         <p:spPr>
           <a:xfrm>
-            <a:off x="6217920" y="1965960"/>
-            <a:ext cx="5440680" cy="1280160"/>
+            <a:off x="822960" y="3383280"/>
+            <a:ext cx="3429000" cy="1737360"/>
           </a:xfrm>
           <a:prstGeom prst="roundRect">
-            <a:avLst/>
+            <a:avLst>
+              <a:gd name="adj" fmla="val 9000"/>
+            </a:avLst>
           </a:prstGeom>
           <a:solidFill>
             <a:srgbClr val="162740"/>
@@ -9642,20 +9603,20 @@
       </p:sp>
       <p:sp>
         <p:nvSpPr>
-          <p:cNvPr id="14" name="Rectangle 13"/>
+          <p:cNvPr id="7" name="Rectangle 6"/>
           <p:cNvSpPr/>
           <p:nvPr/>
         </p:nvSpPr>
         <p:spPr>
           <a:xfrm>
-            <a:off x="6217920" y="1965960"/>
-            <a:ext cx="82296" cy="1280160"/>
+            <a:off x="1097280" y="3675888"/>
+            <a:ext cx="457200" cy="73152"/>
           </a:xfrm>
           <a:prstGeom prst="rect">
             <a:avLst/>
           </a:prstGeom>
           <a:solidFill>
-            <a:srgbClr val="00C2A8"/>
+            <a:srgbClr val="FFB454"/>
           </a:solidFill>
           <a:ln>
             <a:noFill/>
@@ -9686,14 +9647,14 @@
       </p:sp>
       <p:sp>
         <p:nvSpPr>
-          <p:cNvPr id="15" name="TextBox 14"/>
+          <p:cNvPr id="8" name="TextBox 7"/>
           <p:cNvSpPr txBox="1"/>
           <p:nvPr/>
         </p:nvSpPr>
         <p:spPr>
           <a:xfrm>
-            <a:off x="6537960" y="2093976"/>
-            <a:ext cx="4846320" cy="365760"/>
+            <a:off x="1097280" y="3858768"/>
+            <a:ext cx="2880360" cy="457200"/>
           </a:xfrm>
           <a:prstGeom prst="rect">
             <a:avLst/>
@@ -9701,33 +9662,38 @@
           <a:noFill/>
         </p:spPr>
         <p:txBody>
-          <a:bodyPr wrap="square">
+          <a:bodyPr wrap="square" anchor="t" lIns="0" rIns="0" tIns="0" bIns="0">
             <a:spAutoFit/>
           </a:bodyPr>
           <a:lstStyle/>
           <a:p>
-            <a:r>
-              <a:rPr sz="1500" b="1">
+            <a:pPr algn="l">
+              <a:lnSpc>
+                <a:spcPct val="100000"/>
+              </a:lnSpc>
+            </a:pPr>
+            <a:r>
+              <a:rPr sz="1700" b="1">
                 <a:solidFill>
                   <a:srgbClr val="FFFFFF"/>
                 </a:solidFill>
                 <a:latin typeface="Segoe UI"/>
               </a:rPr>
-              <a:t>AI-powered code review</a:t>
-            </a:r>
-          </a:p>
-        </p:txBody>
-      </p:sp>
-      <p:sp>
-        <p:nvSpPr>
-          <p:cNvPr id="16" name="TextBox 15"/>
+              <a:t>Pilot it</a:t>
+            </a:r>
+          </a:p>
+        </p:txBody>
+      </p:sp>
+      <p:sp>
+        <p:nvSpPr>
+          <p:cNvPr id="9" name="TextBox 8"/>
           <p:cNvSpPr txBox="1"/>
           <p:nvPr/>
         </p:nvSpPr>
         <p:spPr>
           <a:xfrm>
-            <a:off x="6537960" y="2459736"/>
-            <a:ext cx="4846320" cy="731520"/>
+            <a:off x="1097280" y="4297680"/>
+            <a:ext cx="2880360" cy="731520"/>
           </a:xfrm>
           <a:prstGeom prst="rect">
             <a:avLst/>
@@ -9735,11 +9701,16 @@
           <a:noFill/>
         </p:spPr>
         <p:txBody>
-          <a:bodyPr wrap="square">
+          <a:bodyPr wrap="square" anchor="t" lIns="0" rIns="0" tIns="0" bIns="0">
             <a:spAutoFit/>
           </a:bodyPr>
           <a:lstStyle/>
           <a:p>
+            <a:pPr algn="l">
+              <a:lnSpc>
+                <a:spcPct val="115000"/>
+              </a:lnSpc>
+            </a:pPr>
             <a:r>
               <a:rPr sz="1200" b="0">
                 <a:solidFill>
@@ -9747,24 +9718,26 @@
                 </a:solidFill>
                 <a:latin typeface="Segoe UI"/>
               </a:rPr>
-              <a:t>Built a review pipeline on AWS Bedrock at Verifiable — cutting PR review time by 30+ minutes per pull request.</a:t>
-            </a:r>
-          </a:p>
-        </p:txBody>
-      </p:sp>
-      <p:sp>
-        <p:nvSpPr>
-          <p:cNvPr id="17" name="Rounded Rectangle 16"/>
+              <a:t>One team, one sprint: identity + tracker + source control + config test.</a:t>
+            </a:r>
+          </a:p>
+        </p:txBody>
+      </p:sp>
+      <p:sp>
+        <p:nvSpPr>
+          <p:cNvPr id="10" name="Rounded Rectangle 9"/>
           <p:cNvSpPr/>
           <p:nvPr/>
         </p:nvSpPr>
         <p:spPr>
           <a:xfrm>
-            <a:off x="6217920" y="3497580"/>
-            <a:ext cx="5440680" cy="1280160"/>
+            <a:off x="4480560" y="3383280"/>
+            <a:ext cx="3429000" cy="1737360"/>
           </a:xfrm>
           <a:prstGeom prst="roundRect">
-            <a:avLst/>
+            <a:avLst>
+              <a:gd name="adj" fmla="val 9000"/>
+            </a:avLst>
           </a:prstGeom>
           <a:solidFill>
             <a:srgbClr val="162740"/>
@@ -9798,20 +9771,20 @@
       </p:sp>
       <p:sp>
         <p:nvSpPr>
-          <p:cNvPr id="18" name="Rectangle 17"/>
+          <p:cNvPr id="11" name="Rectangle 10"/>
           <p:cNvSpPr/>
           <p:nvPr/>
         </p:nvSpPr>
         <p:spPr>
           <a:xfrm>
-            <a:off x="6217920" y="3497580"/>
-            <a:ext cx="82296" cy="1280160"/>
+            <a:off x="4754880" y="3675888"/>
+            <a:ext cx="457200" cy="73152"/>
           </a:xfrm>
           <a:prstGeom prst="rect">
             <a:avLst/>
           </a:prstGeom>
           <a:solidFill>
-            <a:srgbClr val="00C2A8"/>
+            <a:srgbClr val="FFB454"/>
           </a:solidFill>
           <a:ln>
             <a:noFill/>
@@ -9842,14 +9815,14 @@
       </p:sp>
       <p:sp>
         <p:nvSpPr>
-          <p:cNvPr id="19" name="TextBox 18"/>
+          <p:cNvPr id="12" name="TextBox 11"/>
           <p:cNvSpPr txBox="1"/>
           <p:nvPr/>
         </p:nvSpPr>
         <p:spPr>
           <a:xfrm>
-            <a:off x="6537960" y="3625596"/>
-            <a:ext cx="4846320" cy="365760"/>
+            <a:off x="4754880" y="3858768"/>
+            <a:ext cx="2880360" cy="457200"/>
           </a:xfrm>
           <a:prstGeom prst="rect">
             <a:avLst/>
@@ -9857,33 +9830,38 @@
           <a:noFill/>
         </p:spPr>
         <p:txBody>
-          <a:bodyPr wrap="square">
+          <a:bodyPr wrap="square" anchor="t" lIns="0" rIns="0" tIns="0" bIns="0">
             <a:spAutoFit/>
           </a:bodyPr>
           <a:lstStyle/>
           <a:p>
-            <a:r>
-              <a:rPr sz="1500" b="1">
+            <a:pPr algn="l">
+              <a:lnSpc>
+                <a:spcPct val="100000"/>
+              </a:lnSpc>
+            </a:pPr>
+            <a:r>
+              <a:rPr sz="1700" b="1">
                 <a:solidFill>
                   <a:srgbClr val="FFFFFF"/>
                 </a:solidFill>
                 <a:latin typeface="Segoe UI"/>
               </a:rPr>
-              <a:t>Agentic engineering systems</a:t>
-            </a:r>
-          </a:p>
-        </p:txBody>
-      </p:sp>
-      <p:sp>
-        <p:nvSpPr>
-          <p:cNvPr id="20" name="TextBox 19"/>
+              <a:t>Wire in an agent</a:t>
+            </a:r>
+          </a:p>
+        </p:txBody>
+      </p:sp>
+      <p:sp>
+        <p:nvSpPr>
+          <p:cNvPr id="13" name="TextBox 12"/>
           <p:cNvSpPr txBox="1"/>
           <p:nvPr/>
         </p:nvSpPr>
         <p:spPr>
           <a:xfrm>
-            <a:off x="6537960" y="3991356"/>
-            <a:ext cx="4846320" cy="731520"/>
+            <a:off x="4754880" y="4297680"/>
+            <a:ext cx="2880360" cy="731520"/>
           </a:xfrm>
           <a:prstGeom prst="rect">
             <a:avLst/>
@@ -9891,11 +9869,16 @@
           <a:noFill/>
         </p:spPr>
         <p:txBody>
-          <a:bodyPr wrap="square">
+          <a:bodyPr wrap="square" anchor="t" lIns="0" rIns="0" tIns="0" bIns="0">
             <a:spAutoFit/>
           </a:bodyPr>
           <a:lstStyle/>
           <a:p>
+            <a:pPr algn="l">
+              <a:lnSpc>
+                <a:spcPct val="115000"/>
+              </a:lnSpc>
+            </a:pPr>
             <a:r>
               <a:rPr sz="1200" b="0">
                 <a:solidFill>
@@ -9903,24 +9886,26 @@
                 </a:solidFill>
                 <a:latin typeface="Segoe UI"/>
               </a:rPr>
-              <a:t>Specializes in the scaffolding that makes teams move faster: review pipelines, plugin marketplaces, and pncli itself.</a:t>
-            </a:r>
-          </a:p>
-        </p:txBody>
-      </p:sp>
-      <p:sp>
-        <p:nvSpPr>
-          <p:cNvPr id="21" name="Rounded Rectangle 20"/>
+              <a:t>Point your coding agent at pncli for tickets, PRs, and prod checks.</a:t>
+            </a:r>
+          </a:p>
+        </p:txBody>
+      </p:sp>
+      <p:sp>
+        <p:nvSpPr>
+          <p:cNvPr id="14" name="Rounded Rectangle 13"/>
           <p:cNvSpPr/>
           <p:nvPr/>
         </p:nvSpPr>
         <p:spPr>
           <a:xfrm>
-            <a:off x="6217920" y="5029200"/>
-            <a:ext cx="5440680" cy="1280160"/>
+            <a:off x="8138160" y="3383280"/>
+            <a:ext cx="3429000" cy="1737360"/>
           </a:xfrm>
           <a:prstGeom prst="roundRect">
-            <a:avLst/>
+            <a:avLst>
+              <a:gd name="adj" fmla="val 9000"/>
+            </a:avLst>
           </a:prstGeom>
           <a:solidFill>
             <a:srgbClr val="162740"/>
@@ -9954,14 +9939,14 @@
       </p:sp>
       <p:sp>
         <p:nvSpPr>
-          <p:cNvPr id="22" name="Rectangle 21"/>
+          <p:cNvPr id="15" name="Rectangle 14"/>
           <p:cNvSpPr/>
           <p:nvPr/>
         </p:nvSpPr>
         <p:spPr>
           <a:xfrm>
-            <a:off x="6217920" y="5029200"/>
-            <a:ext cx="82296" cy="1280160"/>
+            <a:off x="8412480" y="3675888"/>
+            <a:ext cx="457200" cy="73152"/>
           </a:xfrm>
           <a:prstGeom prst="rect">
             <a:avLst/>
@@ -9998,14 +9983,14 @@
       </p:sp>
       <p:sp>
         <p:nvSpPr>
-          <p:cNvPr id="23" name="TextBox 22"/>
+          <p:cNvPr id="16" name="TextBox 15"/>
           <p:cNvSpPr txBox="1"/>
           <p:nvPr/>
         </p:nvSpPr>
         <p:spPr>
           <a:xfrm>
-            <a:off x="6537960" y="5157216"/>
-            <a:ext cx="4846320" cy="365760"/>
+            <a:off x="8412480" y="3858768"/>
+            <a:ext cx="2880360" cy="457200"/>
           </a:xfrm>
           <a:prstGeom prst="rect">
             <a:avLst/>
@@ -10013,33 +9998,38 @@
           <a:noFill/>
         </p:spPr>
         <p:txBody>
-          <a:bodyPr wrap="square">
+          <a:bodyPr wrap="square" anchor="t" lIns="0" rIns="0" tIns="0" bIns="0">
             <a:spAutoFit/>
           </a:bodyPr>
           <a:lstStyle/>
           <a:p>
-            <a:r>
-              <a:rPr sz="1500" b="1">
+            <a:pPr algn="l">
+              <a:lnSpc>
+                <a:spcPct val="100000"/>
+              </a:lnSpc>
+            </a:pPr>
+            <a:r>
+              <a:rPr sz="1700" b="1">
                 <a:solidFill>
                   <a:srgbClr val="FFFFFF"/>
                 </a:solidFill>
                 <a:latin typeface="Segoe UI"/>
               </a:rPr>
-              <a:t>More than code</a:t>
-            </a:r>
-          </a:p>
-        </p:txBody>
-      </p:sp>
-      <p:sp>
-        <p:nvSpPr>
-          <p:cNvPr id="24" name="TextBox 23"/>
+              <a:t>Seed the marketplace</a:t>
+            </a:r>
+          </a:p>
+        </p:txBody>
+      </p:sp>
+      <p:sp>
+        <p:nvSpPr>
+          <p:cNvPr id="17" name="TextBox 16"/>
           <p:cNvSpPr txBox="1"/>
           <p:nvPr/>
         </p:nvSpPr>
         <p:spPr>
           <a:xfrm>
-            <a:off x="6537960" y="5522976"/>
-            <a:ext cx="4846320" cy="731520"/>
+            <a:off x="8412480" y="4297680"/>
+            <a:ext cx="2880360" cy="731520"/>
           </a:xfrm>
           <a:prstGeom prst="rect">
             <a:avLst/>
@@ -10047,11 +10037,16 @@
           <a:noFill/>
         </p:spPr>
         <p:txBody>
-          <a:bodyPr wrap="square">
+          <a:bodyPr wrap="square" anchor="t" lIns="0" rIns="0" tIns="0" bIns="0">
             <a:spAutoFit/>
           </a:bodyPr>
           <a:lstStyle/>
           <a:p>
+            <a:pPr algn="l">
+              <a:lnSpc>
+                <a:spcPct val="115000"/>
+              </a:lnSpc>
+            </a:pPr>
             <a:r>
               <a:rPr sz="1200" b="0">
                 <a:solidFill>
@@ -10059,7 +10054,55 @@
                 </a:solidFill>
                 <a:latin typeface="Segoe UI"/>
               </a:rPr>
-              <a:t>Mentors engineers across organizations — and co-founded melodic thrash band Deadiron, where high-functioning teams are a stage skill too.</a:t>
+              <a:t>Stand up an internal skills repo and publish your first team skill.</a:t>
+            </a:r>
+          </a:p>
+        </p:txBody>
+      </p:sp>
+      <p:sp>
+        <p:nvSpPr>
+          <p:cNvPr id="18" name="TextBox 17"/>
+          <p:cNvSpPr txBox="1"/>
+          <p:nvPr/>
+        </p:nvSpPr>
+        <p:spPr>
+          <a:xfrm>
+            <a:off x="822960" y="5760720"/>
+            <a:ext cx="10058400" cy="457200"/>
+          </a:xfrm>
+          <a:prstGeom prst="rect">
+            <a:avLst/>
+          </a:prstGeom>
+          <a:noFill/>
+        </p:spPr>
+        <p:txBody>
+          <a:bodyPr wrap="square" anchor="t" lIns="0" rIns="0" tIns="0" bIns="0">
+            <a:spAutoFit/>
+          </a:bodyPr>
+          <a:lstStyle/>
+          <a:p>
+            <a:pPr algn="l">
+              <a:lnSpc>
+                <a:spcPct val="100000"/>
+              </a:lnSpc>
+            </a:pPr>
+            <a:r>
+              <a:rPr sz="1600" b="1">
+                <a:solidFill>
+                  <a:srgbClr val="00C2A8"/>
+                </a:solidFill>
+                <a:latin typeface="Consolas"/>
+              </a:rPr>
+              <a:t>pncli config test</a:t>
+            </a:r>
+            <a:r>
+              <a:rPr sz="1600" b="0">
+                <a:solidFill>
+                  <a:srgbClr val="AFBECF"/>
+                </a:solidFill>
+                <a:latin typeface="Segoe UI"/>
+              </a:rPr>
+              <a:t>   —   green across the board is ten minutes away.</a:t>
             </a:r>
           </a:p>
         </p:txBody>
@@ -10959,6 +11002,49 @@
           </a:p>
         </p:txBody>
       </p:sp>
+      <p:sp>
+        <p:nvSpPr>
+          <p:cNvPr id="23" name="TextBox 22"/>
+          <p:cNvSpPr txBox="1"/>
+          <p:nvPr/>
+        </p:nvSpPr>
+        <p:spPr>
+          <a:xfrm>
+            <a:off x="548640" y="6172200"/>
+            <a:ext cx="11064240" cy="457200"/>
+          </a:xfrm>
+          <a:prstGeom prst="rect">
+            <a:avLst/>
+          </a:prstGeom>
+          <a:noFill/>
+        </p:spPr>
+        <p:txBody>
+          <a:bodyPr wrap="square">
+            <a:spAutoFit/>
+          </a:bodyPr>
+          <a:lstStyle/>
+          <a:p>
+            <a:r>
+              <a:rPr sz="1400" b="0">
+                <a:solidFill>
+                  <a:srgbClr val="5A6B7E"/>
+                </a:solidFill>
+                <a:latin typeface="Segoe UI"/>
+              </a:rPr>
+              <a:t>Developing across 17 portals is like cooking a five-course dinner in seventeen kitchens — </a:t>
+            </a:r>
+            <a:r>
+              <a:rPr sz="1400" b="1">
+                <a:solidFill>
+                  <a:srgbClr val="1A2433"/>
+                </a:solidFill>
+                <a:latin typeface="Segoe UI"/>
+              </a:rPr>
+              <a:t>the recipe is fine; the commute is killing you.</a:t>
+            </a:r>
+          </a:p>
+        </p:txBody>
+      </p:sp>
     </p:spTree>
   </p:cSld>
   <p:clrMapOvr>
@@ -12028,6 +12114,49 @@
           </a:p>
         </p:txBody>
       </p:sp>
+      <p:sp>
+        <p:nvSpPr>
+          <p:cNvPr id="26" name="TextBox 25"/>
+          <p:cNvSpPr txBox="1"/>
+          <p:nvPr/>
+        </p:nvSpPr>
+        <p:spPr>
+          <a:xfrm>
+            <a:off x="548640" y="6263640"/>
+            <a:ext cx="11064240" cy="457200"/>
+          </a:xfrm>
+          <a:prstGeom prst="rect">
+            <a:avLst/>
+          </a:prstGeom>
+          <a:noFill/>
+        </p:spPr>
+        <p:txBody>
+          <a:bodyPr wrap="square">
+            <a:spAutoFit/>
+          </a:bodyPr>
+          <a:lstStyle/>
+          <a:p>
+            <a:r>
+              <a:rPr sz="1300" b="0">
+                <a:solidFill>
+                  <a:srgbClr val="C5D2E0"/>
+                </a:solidFill>
+                <a:latin typeface="Segoe UI"/>
+              </a:rPr>
+              <a:t>The old toolchain was a drawer of single-use gadgets. pncli is the chef's knife — </a:t>
+            </a:r>
+            <a:r>
+              <a:rPr sz="1300" b="1">
+                <a:solidFill>
+                  <a:srgbClr val="FFB454"/>
+                </a:solidFill>
+                <a:latin typeface="Segoe UI"/>
+              </a:rPr>
+              <a:t>one blade, every prep job.</a:t>
+            </a:r>
+          </a:p>
+        </p:txBody>
+      </p:sp>
     </p:spTree>
   </p:cSld>
   <p:clrMapOvr>
@@ -17228,6 +17357,49 @@
                 <a:latin typeface="Consolas"/>
               </a:rPr>
               <a:t>running: 11   pending: 0   failed: 1   crashloopbackoff: my-service-7d9f...</a:t>
+            </a:r>
+          </a:p>
+        </p:txBody>
+      </p:sp>
+      <p:sp>
+        <p:nvSpPr>
+          <p:cNvPr id="9" name="TextBox 8"/>
+          <p:cNvSpPr txBox="1"/>
+          <p:nvPr/>
+        </p:nvSpPr>
+        <p:spPr>
+          <a:xfrm>
+            <a:off x="548640" y="6263640"/>
+            <a:ext cx="11064240" cy="457200"/>
+          </a:xfrm>
+          <a:prstGeom prst="rect">
+            <a:avLst/>
+          </a:prstGeom>
+          <a:noFill/>
+        </p:spPr>
+        <p:txBody>
+          <a:bodyPr wrap="square">
+            <a:spAutoFit/>
+          </a:bodyPr>
+          <a:lstStyle/>
+          <a:p>
+            <a:r>
+              <a:rPr sz="1300" b="0">
+                <a:solidFill>
+                  <a:srgbClr val="C5D2E0"/>
+                </a:solidFill>
+                <a:latin typeface="Segoe UI"/>
+              </a:rPr>
+              <a:t>The old morning was like running to the store for every single ingredient. This is mise en place — </a:t>
+            </a:r>
+            <a:r>
+              <a:rPr sz="1300" b="1">
+                <a:solidFill>
+                  <a:srgbClr val="FFB454"/>
+                </a:solidFill>
+                <a:latin typeface="Segoe UI"/>
+              </a:rPr>
+              <a:t>everything within arm's reach.</a:t>
             </a:r>
           </a:p>
         </p:txBody>

--- a/pncli-overview.pptx
+++ b/pncli-overview.pptx
@@ -1064,39 +1064,122 @@
           <a:lstStyle/>
           <a:p>
             <a:r>
-              <a:t>Start with the pain — everyone in the room lives this.</a:t>
-            </a:r>
-          </a:p>
-          <a:p>
-            <a:endParaRPr/>
-          </a:p>
-          <a:p>
-            <a:r>
-              <a:t>We run a serious enterprise stack: Jira or Azure DevOps for work, Bitbucket or GitHub for code, Jenkins for builds, SonarQube, Checkmarx, Contrast, and Sonatype for security, ServiceNow for change management, OpenShift for runtime. Individually great; together, fragmented.</a:t>
-            </a:r>
-          </a:p>
-          <a:p>
-            <a:endParaRPr/>
-          </a:p>
-          <a:p>
-            <a:r>
-              <a:t>Point one and two: the human cost. Every routine task is a tour of browser tabs and login prompts.</a:t>
-            </a:r>
-          </a:p>
-          <a:p>
-            <a:endParaRPr/>
-          </a:p>
-          <a:p>
-            <a:r>
-              <a:t>Point three: the automation cost. Teams keep writing bespoke scripts against 17 different REST APIs, each with its own auth style. They rot quickly.</a:t>
-            </a:r>
-          </a:p>
-          <a:p>
-            <a:endParaRPr/>
-          </a:p>
-          <a:p>
-            <a:r>
-              <a:t>Point four is the kicker — highlighted in amber: AI coding agents are now doing real work in our repos, but they cannot click around web UIs. If a tool has no CLI, it effectively doesn't exist for the agent. That's the gap pncli closes.</a:t>
+              <a:rPr lang="en-US" dirty="0"/>
+              <a:t>Everyone in this chat knows the pain.</a:t>
+            </a:r>
+          </a:p>
+          <a:p>
+            <a:endParaRPr lang="en-US" dirty="0"/>
+          </a:p>
+          <a:p>
+            <a:r>
+              <a:rPr lang="en-US" dirty="0"/>
+              <a:t>Our enterprise stack is like a restaurant with seventeen excellent cooking stations </a:t>
+            </a:r>
+          </a:p>
+          <a:p>
+            <a:r>
+              <a:rPr lang="en-US" dirty="0"/>
+              <a:t>and one exhausted chef. Jira takes the orders, </a:t>
+            </a:r>
+          </a:p>
+          <a:p>
+            <a:endParaRPr lang="en-US" dirty="0"/>
+          </a:p>
+          <a:p>
+            <a:r>
+              <a:rPr lang="en-US" dirty="0"/>
+              <a:t>GitHub holds the recipes, </a:t>
+            </a:r>
+          </a:p>
+          <a:p>
+            <a:r>
+              <a:rPr lang="en-US" dirty="0"/>
+              <a:t>Jenkins runs the oven, </a:t>
+            </a:r>
+          </a:p>
+          <a:p>
+            <a:r>
+              <a:rPr lang="en-US" dirty="0"/>
+              <a:t>the security tools inspect the ingredients, </a:t>
+            </a:r>
+          </a:p>
+          <a:p>
+            <a:r>
+              <a:rPr lang="en-US" dirty="0"/>
+              <a:t>ServiceNow handles complaints, </a:t>
+            </a:r>
+          </a:p>
+          <a:p>
+            <a:r>
+              <a:rPr lang="en-US" dirty="0"/>
+              <a:t>and OpenShift keeps the burners lit.</a:t>
+            </a:r>
+          </a:p>
+          <a:p>
+            <a:endParaRPr lang="en-US" dirty="0"/>
+          </a:p>
+          <a:p>
+            <a:r>
+              <a:rPr lang="en-US" dirty="0"/>
+              <a:t>The problem is that every small task sends the chef sprinting across the kitchen, </a:t>
+            </a:r>
+          </a:p>
+          <a:p>
+            <a:r>
+              <a:rPr lang="en-US" dirty="0"/>
+              <a:t>logging into another screen and hoping nothing catches fire.</a:t>
+            </a:r>
+          </a:p>
+          <a:p>
+            <a:endParaRPr lang="en-US" dirty="0"/>
+          </a:p>
+          <a:p>
+            <a:r>
+              <a:rPr lang="en-US" dirty="0"/>
+              <a:t>Then we automate it with custom scripts—basically homemade extension cords connecting seventeen appliances with seventeen different plugs. </a:t>
+            </a:r>
+          </a:p>
+          <a:p>
+            <a:r>
+              <a:rPr lang="en-US" dirty="0"/>
+              <a:t>They work great until someone updates the toaster.</a:t>
+            </a:r>
+          </a:p>
+          <a:p>
+            <a:endParaRPr lang="en-US" dirty="0"/>
+          </a:p>
+          <a:p>
+            <a:r>
+              <a:rPr lang="en-US" dirty="0"/>
+              <a:t>And now AI agents are ready to help, but without a CLI, </a:t>
+            </a:r>
+          </a:p>
+          <a:p>
+            <a:r>
+              <a:rPr lang="en-US"/>
+              <a:t>they </a:t>
+            </a:r>
+            <a:r>
+              <a:rPr lang="en-US" dirty="0"/>
+              <a:t>are robot sous-chefs standing outside the kitchen with no door </a:t>
+            </a:r>
+            <a:r>
+              <a:rPr lang="en-US"/>
+              <a:t>handle.</a:t>
+            </a:r>
+          </a:p>
+          <a:p>
+            <a:endParaRPr lang="en-US" dirty="0"/>
+          </a:p>
+          <a:p>
+            <a:r>
+              <a:rPr lang="en-US" dirty="0" err="1"/>
+              <a:t>pncli</a:t>
+            </a:r>
+            <a:r>
+              <a:rPr lang="en-US" dirty="0"/>
+              <a:t> gives humans and agents one order window, one language, and one reliable way to run the whole kitchen.</a:t>
             </a:r>
           </a:p>
         </p:txBody>

--- a/pncli-overview.pptx
+++ b/pncli-overview.pptx
@@ -1157,16 +1157,8 @@
           </a:p>
           <a:p>
             <a:r>
-              <a:rPr lang="en-US"/>
-              <a:t>they </a:t>
-            </a:r>
-            <a:r>
               <a:rPr lang="en-US" dirty="0"/>
-              <a:t>are robot sous-chefs standing outside the kitchen with no door </a:t>
-            </a:r>
-            <a:r>
-              <a:rPr lang="en-US"/>
-              <a:t>handle.</a:t>
+              <a:t>they are robot sous-chefs standing outside the kitchen with no door handle.</a:t>
             </a:r>
           </a:p>
           <a:p>
@@ -1249,50 +1241,198 @@
           <a:lstStyle/>
           <a:p>
             <a:r>
-              <a:t>So what is pncli, concretely?</a:t>
-            </a:r>
-          </a:p>
-          <a:p>
-            <a:endParaRPr/>
-          </a:p>
-          <a:p>
-            <a:r>
-              <a:t>It's a single CLI binary that speaks directly to the REST APIs of each tool. Important detail: it needs no vendor CLIs installed — no oc, no kubectl, no per-tool client. That matters on locked-down build agents and developer laptops alike.</a:t>
-            </a:r>
-          </a:p>
-          <a:p>
-            <a:endParaRPr/>
-          </a:p>
-          <a:p>
-            <a:r>
-              <a:t>Walk the four pillars:</a:t>
-            </a:r>
-          </a:p>
-          <a:p>
-            <a:r>
-              <a:t>1. Consistency — every service follows the same 'pncli service command' grammar. Once you know one, you know them all.</a:t>
-            </a:r>
-          </a:p>
-          <a:p>
-            <a:r>
-              <a:t>2. Structured output — everything comes back as a JSON envelope with status, service, command, and data. Scripts and agents parse it trivially.</a:t>
-            </a:r>
-          </a:p>
-          <a:p>
-            <a:r>
-              <a:t>3. Layered configuration — more on this in a moment: env vars for CI, a personal config file, and repo-level defaults that get committed.</a:t>
-            </a:r>
-          </a:p>
-          <a:p>
-            <a:r>
-              <a:t>4. Agent-native design — schema discovery commands, summaries that are pre-processed for reasoning, and input files for large payloads.</a:t>
-            </a:r>
-          </a:p>
-          <a:p>
-            <a:endParaRPr/>
-          </a:p>
-          <a:p>
-            <a:r>
+              <a:rPr lang="en-US" dirty="0"/>
+              <a:t>So what is </a:t>
+            </a:r>
+            <a:r>
+              <a:rPr lang="en-US" dirty="0" err="1"/>
+              <a:t>pncli</a:t>
+            </a:r>
+            <a:r>
+              <a:rPr lang="en-US" dirty="0"/>
+              <a:t>, concretely?</a:t>
+            </a:r>
+          </a:p>
+          <a:p>
+            <a:endParaRPr lang="en-US" dirty="0"/>
+          </a:p>
+          <a:p>
+            <a:r>
+              <a:rPr lang="en-US" dirty="0" err="1"/>
+              <a:t>pncli</a:t>
+            </a:r>
+            <a:r>
+              <a:rPr lang="en-US" dirty="0"/>
+              <a:t> is what happens when we finally stop asking one exhausted chef to operate seventeen different appliances, </a:t>
+            </a:r>
+          </a:p>
+          <a:p>
+            <a:r>
+              <a:rPr lang="en-US" dirty="0"/>
+              <a:t>each with its own buttons, passwords, and instruction manual.</a:t>
+            </a:r>
+          </a:p>
+          <a:p>
+            <a:r>
+              <a:rPr lang="en-US" dirty="0"/>
+              <a:t>It is one CLI binary that talks directly to every tool’s REST API. </a:t>
+            </a:r>
+          </a:p>
+          <a:p>
+            <a:endParaRPr lang="en-US" dirty="0"/>
+          </a:p>
+          <a:p>
+            <a:r>
+              <a:rPr lang="en-US" dirty="0"/>
+              <a:t>No </a:t>
+            </a:r>
+            <a:r>
+              <a:rPr lang="en-US" sz="1200" kern="1200" dirty="0" err="1">
+                <a:solidFill>
+                  <a:schemeClr val="tx1"/>
+                </a:solidFill>
+                <a:latin typeface="+mn-lt"/>
+                <a:ea typeface="+mn-ea"/>
+                <a:cs typeface="+mn-cs"/>
+              </a:rPr>
+              <a:t>oc</a:t>
+            </a:r>
+            <a:r>
+              <a:rPr lang="en-US" dirty="0"/>
+              <a:t>, no </a:t>
+            </a:r>
+            <a:r>
+              <a:rPr lang="en-US" sz="1200" kern="1200" dirty="0" err="1">
+                <a:solidFill>
+                  <a:schemeClr val="tx1"/>
+                </a:solidFill>
+                <a:latin typeface="+mn-lt"/>
+                <a:ea typeface="+mn-ea"/>
+                <a:cs typeface="+mn-cs"/>
+              </a:rPr>
+              <a:t>kubectl</a:t>
+            </a:r>
+            <a:r>
+              <a:rPr lang="en-US" dirty="0"/>
+              <a:t>, no collection of vendor clients duct-taped to the counter. </a:t>
+            </a:r>
+          </a:p>
+          <a:p>
+            <a:endParaRPr lang="en-US" dirty="0"/>
+          </a:p>
+          <a:p>
+            <a:r>
+              <a:rPr lang="en-US" dirty="0"/>
+              <a:t>That makes it ideal for locked-down laptops, build agents, and AI sandboxes.</a:t>
+            </a:r>
+          </a:p>
+          <a:p>
+            <a:endParaRPr lang="en-US" dirty="0"/>
+          </a:p>
+          <a:p>
+            <a:r>
+              <a:rPr lang="en-US" dirty="0"/>
+              <a:t>It works around four simple ideas.</a:t>
+            </a:r>
+          </a:p>
+          <a:p>
+            <a:endParaRPr lang="en-US" dirty="0"/>
+          </a:p>
+          <a:p>
+            <a:r>
+              <a:rPr lang="en-US" dirty="0"/>
+              <a:t>First, consistency: every station uses the same order format—</a:t>
+            </a:r>
+            <a:r>
+              <a:rPr lang="en-US" sz="1200" kern="1200" dirty="0" err="1">
+                <a:solidFill>
+                  <a:schemeClr val="tx1"/>
+                </a:solidFill>
+                <a:latin typeface="+mn-lt"/>
+                <a:ea typeface="+mn-ea"/>
+                <a:cs typeface="+mn-cs"/>
+              </a:rPr>
+              <a:t>pncli</a:t>
+            </a:r>
+            <a:r>
+              <a:rPr lang="en-US" sz="1200" kern="1200" dirty="0">
+                <a:solidFill>
+                  <a:schemeClr val="tx1"/>
+                </a:solidFill>
+                <a:latin typeface="+mn-lt"/>
+                <a:ea typeface="+mn-ea"/>
+                <a:cs typeface="+mn-cs"/>
+              </a:rPr>
+              <a:t> service command</a:t>
+            </a:r>
+            <a:r>
+              <a:rPr lang="en-US" dirty="0"/>
+              <a:t>. Learn how to operate one appliance, and suddenly you can use the whole kitchen.</a:t>
+            </a:r>
+          </a:p>
+          <a:p>
+            <a:endParaRPr lang="en-US" dirty="0"/>
+          </a:p>
+          <a:p>
+            <a:r>
+              <a:rPr lang="en-US" dirty="0"/>
+              <a:t>Second, structured output: everything comes back as predictable JSON, so humans, scripts, and agents do not have to scrape the plate to figure out what was served.</a:t>
+            </a:r>
+          </a:p>
+          <a:p>
+            <a:endParaRPr lang="en-US" dirty="0"/>
+          </a:p>
+          <a:p>
+            <a:r>
+              <a:rPr lang="en-US" dirty="0"/>
+              <a:t>Third, layered configuration: CI credentials come from environment variables, personal settings live in a global config, and repo defaults travel with the code—like labeling every ingredient before the dinner rush.</a:t>
+            </a:r>
+          </a:p>
+          <a:p>
+            <a:endParaRPr lang="en-US" dirty="0"/>
+          </a:p>
+          <a:p>
+            <a:r>
+              <a:rPr lang="en-US" dirty="0"/>
+              <a:t>Fourth, it is agent-native: agents can discover schemas, receive pre-digested summaries, and use files for large inputs instead of trying to cram an entire catering order onto one command line.</a:t>
+            </a:r>
+          </a:p>
+          <a:p>
+            <a:endParaRPr lang="en-US" dirty="0"/>
+          </a:p>
+          <a:p>
+            <a:r>
+              <a:rPr lang="en-US" dirty="0"/>
+              <a:t>Jira and SonarQube may be completely different appliances, but </a:t>
+            </a:r>
+            <a:r>
+              <a:rPr lang="en-US" dirty="0" err="1"/>
+              <a:t>pncli</a:t>
+            </a:r>
+            <a:r>
+              <a:rPr lang="en-US" dirty="0"/>
+              <a:t> gives them the same controls.</a:t>
+            </a:r>
+          </a:p>
+          <a:p>
+            <a:endParaRPr lang="en-US"/>
+          </a:p>
+          <a:p>
+            <a:r>
+              <a:rPr lang="en-US"/>
+              <a:t>And </a:t>
+            </a:r>
+            <a:r>
+              <a:rPr lang="en-US" dirty="0"/>
+              <a:t>that is how we go from one panicked chef running around the kitchen… to this.</a:t>
+            </a:r>
+          </a:p>
+          <a:p>
+            <a:endParaRPr dirty="0"/>
+          </a:p>
+          <a:p>
+            <a:r>
+              <a:rPr dirty="0"/>
               <a:t>The code sample shows the point: Jira and SonarQube are wildly different products, but the command shape is identical.</a:t>
             </a:r>
           </a:p>
